--- a/Base/Tema13_AI_trasformazione_lavoro_processi.pptx
+++ b/Base/Tema13_AI_trasformazione_lavoro_processi.pptx
@@ -68,9 +68,10 @@
     <p:sldId id="316" r:id="rId62"/>
     <p:sldId id="317" r:id="rId63"/>
     <p:sldId id="318" r:id="rId64"/>
+    <p:sldId id="319" r:id="rId65"/>
   </p:sldIdLst>
   <p:notesMasterIdLst>
-    <p:notesMasterId r:id="rId65"/>
+    <p:notesMasterId r:id="rId66"/>
   </p:notesMasterIdLst>
   <p:sldSz cx="9144000" cy="5143500"/>
   <p:notesSz cx="5143500" cy="9144000"/>
@@ -169,7 +170,7 @@
   <p:extLst>
     <p:ext uri="{521415D9-36F7-43E2-AB2F-B90AF26B5E84}">
       <p14:sectionLst xmlns:p14="http://schemas.microsoft.com/office/powerpoint/2010/main">
-        <p14:section name="Introduzione" id="{e9344995-7fb1-0820-1e9a-58e8f843154e}">
+        <p14:section name="Introduzione" id="{da0caf9c-95bc-84d9-2570-367543a31925}">
           <p14:sldIdLst>
             <p14:sldId id="256"/>
             <p14:sldId id="257"/>
@@ -179,7 +180,7 @@
             <p14:sldId id="261"/>
           </p14:sldIdLst>
         </p14:section>
-        <p14:section name="13.1 La natura del lavoro" id="{ce44926c-19bf-68f8-a9ac-1ab244318b8a}">
+        <p14:section name="13.1 La natura del lavoro" id="{cc4e317b-4c3f-ab2f-4af0-ba96087e688e}">
           <p14:sldIdLst>
             <p14:sldId id="262"/>
             <p14:sldId id="263"/>
@@ -191,7 +192,7 @@
             <p14:sldId id="269"/>
           </p14:sldIdLst>
         </p14:section>
-        <p14:section name="13.2 Attività trasformabili" id="{e55c6190-82e1-219a-864c-d36da0783f18}">
+        <p14:section name="13.2 Attività trasformabili" id="{e8e242e8-39be-d260-e099-0d5677e7f882}">
           <p14:sldIdLst>
             <p14:sldId id="270"/>
             <p14:sldId id="271"/>
@@ -201,7 +202,7 @@
             <p14:sldId id="275"/>
           </p14:sldIdLst>
         </p14:section>
-        <p14:section name="13.3 Dal compito al processo" id="{d31ed97b-d91e-67f6-51eb-3b4c1faa3207}">
+        <p14:section name="13.3 Dal compito al processo" id="{d19fe8d0-67af-2ae0-eb78-8735f2a5fe78}">
           <p14:sldIdLst>
             <p14:sldId id="276"/>
             <p14:sldId id="277"/>
@@ -213,7 +214,7 @@
             <p14:sldId id="283"/>
           </p14:sldIdLst>
         </p14:section>
-        <p14:section name="13.4 Collaborazione persone e AI" id="{fc00a68b-ef8d-1a45-fcad-99aef726dab3}">
+        <p14:section name="13.4 Collaborazione persone e AI" id="{8dcde135-bf16-6ef3-cf0c-6fdcd2157e96}">
           <p14:sldIdLst>
             <p14:sldId id="284"/>
             <p14:sldId id="285"/>
@@ -223,7 +224,7 @@
             <p14:sldId id="289"/>
           </p14:sldIdLst>
         </p14:section>
-        <p14:section name="13.5 Ruoli e responsabilità" id="{b561325a-b348-f33e-be42-eaef25ae1c20}">
+        <p14:section name="13.5 Ruoli e responsabilità" id="{e8052db4-7166-76f7-0172-cec52f92db94}">
           <p14:sldIdLst>
             <p14:sldId id="290"/>
             <p14:sldId id="291"/>
@@ -234,7 +235,7 @@
             <p14:sldId id="296"/>
           </p14:sldIdLst>
         </p14:section>
-        <p14:section name="13.6 Team e funzioni" id="{8942e964-f743-cf19-22b5-e531d0eddb09}">
+        <p14:section name="13.6 Team e funzioni" id="{6d443408-9c1b-d7e0-d302-dd31ef3276bc}">
           <p14:sldIdLst>
             <p14:sldId id="297"/>
             <p14:sldId id="298"/>
@@ -243,7 +244,7 @@
             <p14:sldId id="301"/>
           </p14:sldIdLst>
         </p14:section>
-        <p14:section name="13.7 Competenze" id="{58ac4e59-3ea5-38fd-3a93-1884cef1f014}">
+        <p14:section name="13.7 Competenze" id="{da094852-e671-edc1-c752-b65a2d096a6b}">
           <p14:sldIdLst>
             <p14:sldId id="302"/>
             <p14:sldId id="303"/>
@@ -253,7 +254,7 @@
             <p14:sldId id="307"/>
           </p14:sldIdLst>
         </p14:section>
-        <p14:section name="13.8 Condizioni e rischi" id="{00bed82e-7f7a-954a-2302-ea5e5bae7c8c}">
+        <p14:section name="13.8 Condizioni e rischi" id="{13a7bc1e-fa57-9d04-cb85-ff04ba57669b}">
           <p14:sldIdLst>
             <p14:sldId id="308"/>
             <p14:sldId id="309"/>
@@ -263,13 +264,14 @@
             <p14:sldId id="313"/>
           </p14:sldIdLst>
         </p14:section>
-        <p14:section name="Conclusioni" id="{8afbfb60-3372-5aea-d647-6067371e3d64}">
+        <p14:section name="Conclusioni" id="{70cdc2c4-2bb0-680a-20b0-29513651febe}">
           <p14:sldIdLst>
             <p14:sldId id="314"/>
             <p14:sldId id="315"/>
             <p14:sldId id="316"/>
             <p14:sldId id="317"/>
             <p14:sldId id="318"/>
+            <p14:sldId id="319"/>
           </p14:sldIdLst>
         </p14:section>
       </p14:sectionLst>
@@ -1344,7 +1346,7 @@
           <a:p>
             <a:r>
               <a:rPr lang="en-US" dirty="0"/>
-              <a:t>Benvenuti al tredicesimo tema, il secondo dell'area 'Comprendere il valore per l'azienda'. Nel Tema 12 abbiamo visto che il valore dell'AI dipende spesso da scelte organizzative: come si usa il tempo liberato, come cambiano i processi, come si mantengono le competenze. Qui guardiamo proprio a questo: come l'AI può modificare le attività professionali, i processi, la collaborazione, le competenze e i ruoli. È un tema delicato, perché tocca da vicino le persone e il loro lavoro, ed è spesso affrontato nei media con toni estremi: o la promessa che l'AI libererà tutti dalle attività noiose, o il timore che sostituirà intere professioni. Il documento di perimetro chiede un approccio diverso: riconoscere che gli effetti sul lavoro dipendono tanto dalle capacità tecnologiche quanto dalle scelte organizzative, e non sono predeterminati. Non facciamo previsioni occupazionali, che richiederebbero analisi specialistiche; diamo strumenti per capire che cosa può cambiare e da che cosa dipende. Il confine con il Tema 16: qui studiamo che cosa cambia nel lavoro; nel Tema 16 vedremo come gestire e accompagnare il cambiamento. Suggerimento per l'apertura: chiedere ai partecipanti di descrivere in tre righe come è cambiato il loro lavoro negli ultimi due anni, se è cambiato, per effetto dell'AI.</a:t>
+              <a:t>Benvenuti al tredicesimo tema, il secondo dell'area 'Comprendere il valore per l'azienda'. Nel Tema 12 abbiamo visto che il valore dell'AI dipende spesso da scelte organizzative: come si usa il tempo liberato, come cambiano i processi, come si mantengono le competenze. Qui guardiamo proprio a questo: come l'AI può modificare le attività professionali, i processi, la collaborazione, le competenze e i ruoli. È un tema delicato, perché tocca da vicino le persone e il loro lavoro, ed è spesso affrontato nei media con toni estremi: o la promessa che l'AI libererà tutti dalle attività noiose, o il timore che sostituirà intere professioni. Il documento di perimetro chiede un approccio diverso: riconoscere che gli effetti sul lavoro dipendono tanto dalle capacità tecnologiche quanto dalle scelte organizzative, e non sono predeterminati. Non facciamo previsioni occupazionali, che richiederebbero analisi specialistiche; diamo strumenti per capire che cosa può cambiare e da che cosa dipende. Il confine con il Tema 16: qui studiamo che cosa cambia nel lavoro; nel Tema 16 vedremo come gestire e accompagnare il cambiamento. Suggerimento per l'apertura: chiedere ai partecipanti di descrivere in tre righe come è cambiato il loro lavoro negli ultimi due anni, se è cambiato, per effetto dell'AI. Nota per il relatore: i contenuti sono stati verificati a ottobre 2026; il dibattito sugli effetti dell'AI sul lavoro è molto attivo, e stime e studi vanno ricontrollati prima di ogni edizione.</a:t>
             </a:r>
             <a:endParaRPr lang="en-US" dirty="0"/>
           </a:p>
@@ -5040,7 +5042,7 @@
           <a:p>
             <a:r>
               <a:rPr lang="en-US" dirty="0"/>
-              <a:t>Il sottotema elenca una serie di competenze, che corrispondono in buona parte ai temi di questo percorso. Le competenze digitali e l'alfabetizzazione AI: sapere che cos'è l'AI, come funziona a grandi linee, che cosa sa fare e dove sbaglia, i Temi dall'1 al 4. La capacità di formulare problemi e obiettivi: sapere che cosa chiedere, e perché, i Temi 5 e 6. La valutazione critica degli output, il Tema 7. La supervisione delle attività assistite dall'AI: sapere dove controllare, come, con quale intensità, il Tema 11. Le competenze interpretative e decisionali: attribuire significato ai risultati e decidere, i Temi 9 e 12. La collaborazione uomo-AI: saper distribuire il lavoro tra sé e il sistema, il 13.4. L'apprendimento continuo: gli strumenti cambiano rapidamente, e le competenze vanno aggiornate. A queste si aggiunge la competenza che il sottotema richiama esplicitamente: la capacità di riconoscere e correggere gli errori. È la sintesi di tutte le altre, e dipende in modo decisivo dalla conoscenza del dominio. Non basta sapere che l'AI può sbagliare: bisogna saper vedere dove ha sbagliato, in un lavoro che si conosce.</a:t>
+              <a:t>Il sottotema elenca una serie di competenze, che corrispondono in buona parte ai temi di questo percorso. Le competenze digitali e l'alfabetizzazione AI: sapere che cos'è l'AI, come funziona a grandi linee, che cosa sa fare e dove sbaglia, i Temi dall'1 al 4. La capacità di formulare problemi e obiettivi: sapere che cosa chiedere, e perché, i Temi 5 e 6. La valutazione critica degli output, il Tema 7. La supervisione delle attività assistite dall'AI: sapere dove controllare, come, con quale intensità, il Tema 11. Le competenze interpretative e decisionali: attribuire significato ai risultati e decidere, i Temi 9 e 12. La collaborazione uomo-AI: saper distribuire il lavoro tra sé e il sistema, il 13.4. L'apprendimento continuo: gli strumenti cambiano rapidamente, e le competenze vanno aggiornate. A queste si aggiunge la competenza che il sottotema richiama esplicitamente: la capacità di riconoscere e correggere gli errori. È la sintesi di tutte le altre, e dipende in modo decisivo dalla conoscenza del dominio. Non basta sapere che l'AI può sbagliare: bisogna saper vedere dove ha sbagliato, in un lavoro che si conosce. Per il relatore: la corrispondenza con i temi del percorso è indicata in questa nota e non sulla slide, così la slide resta valida anche quando il modulo è presentato da solo.</a:t>
             </a:r>
             <a:endParaRPr lang="en-US" dirty="0"/>
           </a:p>
@@ -5920,7 +5922,7 @@
           <a:p>
             <a:r>
               <a:rPr lang="en-US" dirty="0"/>
-              <a:t>Il principio di metodo con cui il sottotema, e il tema, si chiudono: l'importanza di osservare il lavoro reale. La consapevolezza del sottotema lo dice chiaramente: l'impatto dell'AI va valutato osservando l'intero lavoro effettivamente svolto, non solo le prestazioni degli strumenti. Che cosa significa in pratica? Guardare come le persone lavorano davvero, non come i processi sono descritti nelle procedure o come i fornitori descrivono gli strumenti. Chiedere a chi svolge il lavoro che cosa è cambiato, che cosa è più facile, che cosa è più difficile, dove passa ora il tempo. Seguire un'attività dall'inizio alla fine, attraverso le persone e le funzioni, per vedere dove si sono spostati il lavoro, le attese e i controlli. Osservare non solo chi usa lo strumento, ma anche chi riceve il suo lavoro e chi lo verifica. Osservare nel tempo, perché alcuni effetti, come la perdita di competenze o il sovraccarico, emergono dopo mesi. Combinare le osservazioni con gli indicatori visti nel Tema 12. È un lavoro meno tecnico e meno spettacolare della valutazione degli strumenti, ma è il solo modo di sapere che cosa l'AI sta davvero facendo al lavoro di un'organizzazione. E coinvolgere le persone nell'osservazione è anche il primo passo per gestire bene il cambiamento, come vedremo nel Tema 16.</a:t>
+              <a:t>Il principio di metodo con cui il sottotema, e il tema, si chiudono: l'importanza di osservare il lavoro reale. La consapevolezza del sottotema lo dice chiaramente: l'impatto dell'AI va valutato osservando l'intero lavoro effettivamente svolto, non solo le prestazioni degli strumenti. Che cosa significa in pratica? Guardare come le persone lavorano davvero, non come i processi sono descritti nelle procedure o come i fornitori descrivono gli strumenti. Chiedere a chi svolge il lavoro che cosa è cambiato, che cosa è più facile, che cosa è più difficile, dove passa ora il tempo. Seguire un'attività dall'inizio alla fine, attraverso le persone e le funzioni, per vedere dove si sono spostati il lavoro, le attese e i controlli. Osservare non solo chi usa lo strumento, ma anche chi riceve il suo lavoro e chi lo verifica. Osservare nel tempo, perché alcuni effetti, come la perdita di competenze o il sovraccarico, emergono dopo mesi. Combinare le osservazioni con gli indicatori visti nel Tema 12. È un lavoro meno tecnico e meno spettacolare della valutazione degli strumenti, ma è il solo modo di sapere che cosa l'AI sta davvero facendo al lavoro di un'organizzazione. E coinvolgere le persone nell'osservazione è anche il primo passo per gestire bene il cambiamento, come vedremo nel Tema 16. Gli indicatori di risultato sono quelli visti nel Tema 12.</a:t>
             </a:r>
             <a:endParaRPr lang="en-US" dirty="0"/>
           </a:p>
@@ -6448,7 +6450,7 @@
           <a:p>
             <a:r>
               <a:rPr lang="en-US" dirty="0"/>
-              <a:t>Con il Tema 13 abbiamo visto come l'AI può cambiare il lavoro, e che gli effetti dipendono dalle scelte organizzative. Il tema successivo, il Tema 14, è dedicato all'AI, ai dati e alla conoscenza aziendale: il patrimonio informativo dell'azienda, la qualità e l'aggiornamento delle informazioni, l'organizzazione e l'accessibilità della conoscenza, come l'AI può usare informazioni aziendali specifiche, l'integrazione con i sistemi, gli accessi e i permessi, l'affidabilità delle risposte basate sulla conoscenza aziendale. È il naturale complemento di questo modulo: abbiamo visto più volte che la trasformabilità di un'attività dipende dalla disponibilità delle informazioni, che le conoscenze organizzative rischiano di perdersi, che l'AI vale quanto le informazioni su cui si basa. Nel Tema 14 guarderemo proprio a queste condizioni informative. Seguiranno il Tema 15, sulla valutazione e la scelta delle opportunità, e il Tema 16, sull'adozione e il cambiamento organizzativo, dove molte questioni aperte in questo modulo, come accompagnare le persone, troveranno una risposta operativa. Lasciare spazio alle domande finali.</a:t>
+              <a:t>Chiudiamo con sei semplificazioni frequenti quando si parla di AI e lavoro, una per ciascuno dei principali messaggi del modulo. Primo: 'l'AI scrive email, quindi gli addetti spariranno'. È il salto da un compito al ruolo intero: un ruolo comprende molte attività, e l'automazione di alcune non determina la scomparsa dell'intero ruolo, come mostra l'esempio dei bancomat. Secondo: 'è esposto, quindi verrà sostituito'. L'esposizione indica una possibilità tecnica; tra questa e l'effetto sul lavoro ci sono affidabilità, convenienza, adozione e scelte organizzative. Terzo: 'mettiamo l'AI nel processo attuale', così com'è. Automatizzare un processo inefficiente produce un processo inefficiente più veloce, e più difficile da cambiare. Quarto: 'ognuno usa lo strumento che vuole'. I miglioramenti individuali non si sommano automaticamente: senza regole comuni nascono duplicazioni, frammentazione e incoerenze. Quinto: 'il junior controlla l'AI, così impara'. Senza occasioni di pratica, chi sta imparando non sviluppa le competenze che servono proprio per controllare; è il paradosso del supervisore inesperto. Sesto: 'lo usano tutti, quindi il lavoro è cambiato'. L'adozione non è trasformazione: il cambiamento si osserva guardando il lavoro reale. Suggerimento: chiedere ai partecipanti quale di queste frasi hanno sentito più spesso in azienda.</a:t>
             </a:r>
             <a:endParaRPr lang="en-US" dirty="0"/>
           </a:p>
@@ -6536,7 +6538,7 @@
           <a:p>
             <a:r>
               <a:rPr lang="en-US" dirty="0"/>
-              <a:t>Le fonti citate nel modulo. Il dibattito sugli effetti dell'AI sul lavoro è molto attivo e in rapida evoluzione: le stime di esposizione e gli studi sugli effetti vengono aggiornati di continuo, ed è consigliabile verificarli prima di ogni edizione. L'esempio storico dei bancomat è tra i più citati nella letteratura economica, ma va presentato con le sue cautele, come fatto nelle slide. Gli esempi aziendali del modulo sono fittizi, tranne quello della richiesta del cliente, tratto dal documento di perimetro.</a:t>
+              <a:t>Con il Tema 13 abbiamo visto come l'AI può cambiare il lavoro, e che gli effetti dipendono dalle scelte organizzative. Il tema successivo, il Tema 14, è dedicato all'AI, ai dati e alla conoscenza aziendale: il patrimonio informativo dell'azienda, la qualità e l'aggiornamento delle informazioni, l'organizzazione e l'accessibilità della conoscenza, come l'AI può usare informazioni aziendali specifiche, l'integrazione con i sistemi, gli accessi e i permessi, l'affidabilità delle risposte basate sulla conoscenza aziendale. È il naturale complemento di questo modulo: abbiamo visto più volte che la trasformabilità di un'attività dipende dalla disponibilità delle informazioni, che le conoscenze organizzative rischiano di perdersi, che l'AI vale quanto le informazioni su cui si basa. Nel Tema 14 guarderemo proprio a queste condizioni informative. Seguiranno il Tema 15, sulla valutazione e la scelta delle opportunità, e il Tema 16, sull'adozione e il cambiamento organizzativo, dove molte questioni aperte in questo modulo, come accompagnare le persone, troveranno una risposta operativa. Lasciare spazio alle domande finali. Slide facoltativa: se il modulo è presentato da solo o in una selezione di slide, può essere nascosta o tolta senza perdere nulla del contenuto.</a:t>
             </a:r>
             <a:endParaRPr lang="en-US" dirty="0"/>
           </a:p>
@@ -6560,6 +6562,94 @@
             <a:fld id="{F7021451-1387-4CA6-816F-3879F97B5CBC}" type="slidenum">
               <a:rPr lang="en-US"/>
               <a:t>63</a:t>
+            </a:fld>
+            <a:endParaRPr lang="en-US"/>
+          </a:p>
+        </p:txBody>
+      </p:sp>
+    </p:spTree>
+    <p:extLst>
+      <p:ext uri="{BB962C8B-B14F-4D97-AF65-F5344CB8AC3E}">
+        <p14:creationId xmlns:p14="http://schemas.microsoft.com/office/powerpoint/2010/main" val="1024086991"/>
+      </p:ext>
+    </p:extLst>
+  </p:cSld>
+  <p:clrMapOvr>
+    <a:masterClrMapping/>
+  </p:clrMapOvr>
+</p:notes>
+</file>
+
+<file path=ppt/notesSlides/notesSlide64.xml><?xml version="1.0" encoding="utf-8"?>
+<p:notes xmlns:a="http://schemas.openxmlformats.org/drawingml/2006/main" xmlns:r="http://schemas.openxmlformats.org/officeDocument/2006/relationships" xmlns:p="http://schemas.openxmlformats.org/presentationml/2006/main">
+  <p:cSld>
+    <p:spTree>
+      <p:nvGrpSpPr>
+        <p:cNvPr id="1" name=""/>
+        <p:cNvGrpSpPr/>
+        <p:nvPr/>
+      </p:nvGrpSpPr>
+      <p:grpSpPr>
+        <a:xfrm>
+          <a:off x="0" y="0"/>
+          <a:ext cx="0" cy="0"/>
+          <a:chOff x="0" y="0"/>
+          <a:chExt cx="0" cy="0"/>
+        </a:xfrm>
+      </p:grpSpPr>
+      <p:sp>
+        <p:nvSpPr>
+          <p:cNvPr id="2" name="Slide Image Placeholder 1"/>
+          <p:cNvSpPr>
+            <a:spLocks noGrp="1" noRot="1" noChangeAspect="1"/>
+          </p:cNvSpPr>
+          <p:nvPr>
+            <p:ph type="sldImg"/>
+          </p:nvPr>
+        </p:nvSpPr>
+        <p:spPr/>
+      </p:sp>
+      <p:sp>
+        <p:nvSpPr>
+          <p:cNvPr id="3" name="Notes Placeholder 2"/>
+          <p:cNvSpPr>
+            <a:spLocks noGrp="1"/>
+          </p:cNvSpPr>
+          <p:nvPr>
+            <p:ph type="body" idx="1"/>
+          </p:nvPr>
+        </p:nvSpPr>
+        <p:spPr/>
+        <p:txBody>
+          <a:bodyPr/>
+          <a:lstStyle/>
+          <a:p>
+            <a:r>
+              <a:rPr lang="en-US" dirty="0"/>
+              <a:t>Le stime sull'esposizione (circa l'80 per cento dei lavoratori statunitensi con almeno il 10 per cento dei compiti esposti, circa il 19 per cento con almeno la metà) vengono dall'analisi completa di Eloundou e colleghi; una sintesi è stata pubblicata su Science nel 2024. Verificato a ottobre 2026; da controllare se la sintesi su Science riporta gli stessi valori. Le fonti citate nel modulo. Il dibattito sugli effetti dell'AI sul lavoro è molto attivo e in rapida evoluzione: le stime di esposizione e gli studi sugli effetti vengono aggiornati di continuo, ed è consigliabile verificarli prima di ogni edizione. L'esempio storico dei bancomat è tra i più citati nella letteratura economica, ma va presentato con le sue cautele, come fatto nelle slide. Gli esempi aziendali del modulo sono fittizi, tranne quello della richiesta del cliente, tratto dal documento di perimetro.</a:t>
+            </a:r>
+            <a:endParaRPr lang="en-US" dirty="0"/>
+          </a:p>
+        </p:txBody>
+      </p:sp>
+      <p:sp>
+        <p:nvSpPr>
+          <p:cNvPr id="4" name="Slide Number Placeholder 3"/>
+          <p:cNvSpPr>
+            <a:spLocks noGrp="1"/>
+          </p:cNvSpPr>
+          <p:nvPr>
+            <p:ph type="sldNum" sz="quarter" idx="10"/>
+          </p:nvPr>
+        </p:nvSpPr>
+        <p:spPr/>
+        <p:txBody>
+          <a:bodyPr/>
+          <a:lstStyle/>
+          <a:p>
+            <a:fld id="{F7021451-1387-4CA6-816F-3879F97B5CBC}" type="slidenum">
+              <a:rPr lang="en-US"/>
+              <a:t>64</a:t>
             </a:fld>
             <a:endParaRPr lang="en-US"/>
           </a:p>
@@ -8087,6 +8177,42 @@
           </a:p>
         </p:txBody>
       </p:sp>
+      <p:sp>
+        <p:nvSpPr>
+          <p:cNvPr id="5" name="Text 3"/>
+          <p:cNvSpPr txBox="1"/>
+          <p:nvPr/>
+        </p:nvSpPr>
+        <p:spPr>
+          <a:xfrm>
+            <a:off x="640080" y="4343400"/>
+            <a:ext cx="5486400" cy="274320"/>
+          </a:xfrm>
+          <a:prstGeom prst="rect">
+            <a:avLst/>
+          </a:prstGeom>
+          <a:noFill/>
+          <a:ln/>
+        </p:spPr>
+        <p:txBody>
+          <a:bodyPr wrap="square" lIns="0" tIns="0" rIns="0" bIns="0" rtlCol="0" anchor="t"/>
+          <a:lstStyle/>
+          <a:p>
+            <a:pPr indent="0" marL="0">
+              <a:buNone/>
+            </a:pPr>
+            <a:r>
+              <a:rPr lang="en-US" sz="1100" dirty="0">
+                <a:solidFill>
+                  <a:schemeClr val="accent2"/>
+                </a:solidFill>
+              </a:rPr>
+              <a:t>Contenuti aggiornati a ottobre 2026</a:t>
+            </a:r>
+            <a:endParaRPr lang="en-US" sz="1100" dirty="0"/>
+          </a:p>
+        </p:txBody>
+      </p:sp>
     </p:spTree>
   </p:cSld>
   <p:clrMapOvr>
@@ -8676,7 +8802,7 @@
                   <a:schemeClr val="tx1"/>
                 </a:solidFill>
               </a:rPr>
-              <a:t>Eccezioni e controlli (Tema 11)</a:t>
+              <a:t>Eccezioni e controlli restano umani</a:t>
             </a:r>
             <a:endParaRPr lang="en-US" sz="1200" dirty="0"/>
           </a:p>
@@ -15981,7 +16107,7 @@
                   <a:schemeClr val="tx2"/>
                 </a:solidFill>
               </a:rPr>
-              <a:t>Accessibili, di qualità, non solo nella testa delle persone (Tema 14)</a:t>
+              <a:t>Accessibili, di qualità, non solo nella testa delle persone</a:t>
             </a:r>
             <a:endParaRPr lang="en-US" sz="1200" dirty="0"/>
           </a:p>
@@ -16863,7 +16989,7 @@
         </p:nvSpPr>
         <p:spPr>
           <a:xfrm>
-            <a:off x="640080" y="1051560"/>
+            <a:off x="594360" y="1051560"/>
             <a:ext cx="2011680" cy="365760"/>
           </a:xfrm>
           <a:prstGeom prst="rect">
@@ -16899,8 +17025,8 @@
         </p:nvSpPr>
         <p:spPr>
           <a:xfrm>
-            <a:off x="2651760" y="1051560"/>
-            <a:ext cx="5852160" cy="365760"/>
+            <a:off x="2606040" y="1051560"/>
+            <a:ext cx="5943600" cy="365760"/>
           </a:xfrm>
           <a:prstGeom prst="rect">
             <a:avLst/>
@@ -16957,7 +17083,7 @@
         </p:nvSpPr>
         <p:spPr>
           <a:xfrm>
-            <a:off x="640080" y="1490472"/>
+            <a:off x="594360" y="1490472"/>
             <a:ext cx="2011680" cy="365760"/>
           </a:xfrm>
           <a:prstGeom prst="rect">
@@ -16993,8 +17119,8 @@
         </p:nvSpPr>
         <p:spPr>
           <a:xfrm>
-            <a:off x="2651760" y="1490472"/>
-            <a:ext cx="5852160" cy="365760"/>
+            <a:off x="2606040" y="1490472"/>
+            <a:ext cx="5943600" cy="365760"/>
           </a:xfrm>
           <a:prstGeom prst="rect">
             <a:avLst/>
@@ -17051,7 +17177,7 @@
         </p:nvSpPr>
         <p:spPr>
           <a:xfrm>
-            <a:off x="640080" y="1929384"/>
+            <a:off x="594360" y="1929384"/>
             <a:ext cx="2011680" cy="365760"/>
           </a:xfrm>
           <a:prstGeom prst="rect">
@@ -17087,8 +17213,8 @@
         </p:nvSpPr>
         <p:spPr>
           <a:xfrm>
-            <a:off x="2651760" y="1929384"/>
-            <a:ext cx="5852160" cy="365760"/>
+            <a:off x="2606040" y="1929384"/>
+            <a:ext cx="5943600" cy="365760"/>
           </a:xfrm>
           <a:prstGeom prst="rect">
             <a:avLst/>
@@ -17145,7 +17271,7 @@
         </p:nvSpPr>
         <p:spPr>
           <a:xfrm>
-            <a:off x="640080" y="2368296"/>
+            <a:off x="594360" y="2368296"/>
             <a:ext cx="2011680" cy="365760"/>
           </a:xfrm>
           <a:prstGeom prst="rect">
@@ -17181,8 +17307,8 @@
         </p:nvSpPr>
         <p:spPr>
           <a:xfrm>
-            <a:off x="2651760" y="2368296"/>
-            <a:ext cx="5852160" cy="365760"/>
+            <a:off x="2606040" y="2368296"/>
+            <a:ext cx="5943600" cy="365760"/>
           </a:xfrm>
           <a:prstGeom prst="rect">
             <a:avLst/>
@@ -17239,7 +17365,7 @@
         </p:nvSpPr>
         <p:spPr>
           <a:xfrm>
-            <a:off x="640080" y="2807208"/>
+            <a:off x="594360" y="2807208"/>
             <a:ext cx="2011680" cy="365760"/>
           </a:xfrm>
           <a:prstGeom prst="rect">
@@ -17275,8 +17401,8 @@
         </p:nvSpPr>
         <p:spPr>
           <a:xfrm>
-            <a:off x="2651760" y="2807208"/>
-            <a:ext cx="5852160" cy="365760"/>
+            <a:off x="2606040" y="2807208"/>
+            <a:ext cx="5943600" cy="365760"/>
           </a:xfrm>
           <a:prstGeom prst="rect">
             <a:avLst/>
@@ -17333,7 +17459,7 @@
         </p:nvSpPr>
         <p:spPr>
           <a:xfrm>
-            <a:off x="640080" y="3246120"/>
+            <a:off x="594360" y="3246120"/>
             <a:ext cx="2011680" cy="365760"/>
           </a:xfrm>
           <a:prstGeom prst="rect">
@@ -17369,8 +17495,8 @@
         </p:nvSpPr>
         <p:spPr>
           <a:xfrm>
-            <a:off x="2651760" y="3246120"/>
-            <a:ext cx="5852160" cy="365760"/>
+            <a:off x="2606040" y="3246120"/>
+            <a:ext cx="5943600" cy="365760"/>
           </a:xfrm>
           <a:prstGeom prst="rect">
             <a:avLst/>
@@ -17449,7 +17575,7 @@
                   <a:schemeClr val="bg1"/>
                 </a:solidFill>
               </a:rPr>
-              <a:t>La stessa attività può essere trasformabile in un'azienda e non in un'altra. Scelta e priorità: Tema 15.</a:t>
+              <a:t>La stessa attività può essere trasformabile in un'azienda e non in un'altra.</a:t>
             </a:r>
             <a:endParaRPr lang="en-US" sz="1300" dirty="0"/>
           </a:p>
@@ -18021,7 +18147,7 @@
                   <a:schemeClr val="accent3"/>
                 </a:solidFill>
               </a:rPr>
-              <a:t>Sottotema 13.2  ·  Individuare le attività trasformabili dall'AI</a:t>
+              <a:t>Sottotema 13.2  ·  Individuare le attività trasformabili</a:t>
             </a:r>
             <a:endParaRPr lang="en-US" sz="1300" dirty="0"/>
           </a:p>
@@ -20770,7 +20896,7 @@
                   <a:schemeClr val="accent2"/>
                 </a:solidFill>
               </a:rPr>
-              <a:t>Esempio dal documento di perimetro</a:t>
+              <a:t>Esempio fittizio</a:t>
             </a:r>
             <a:endParaRPr lang="en-US" sz="1000" dirty="0"/>
           </a:p>
@@ -24922,7 +25048,7 @@
                   <a:schemeClr val="accent3"/>
                 </a:solidFill>
               </a:rPr>
-              <a:t>Sottotema 13.3  ·  Dall'ottimizzazione del compito alla trasformazione del processo</a:t>
+              <a:t>Sottotema 13.3  ·  Dal compito al processo</a:t>
             </a:r>
             <a:endParaRPr lang="en-US" sz="1300" dirty="0"/>
           </a:p>
@@ -29708,7 +29834,7 @@
                   <a:schemeClr val="accent3"/>
                 </a:solidFill>
               </a:rPr>
-              <a:t>Sottotema 13.4  ·  Nuovi modelli di collaborazione tra persone e AI</a:t>
+              <a:t>Sottotema 13.4  ·  Collaborazione tra persone e AI</a:t>
             </a:r>
             <a:endParaRPr lang="en-US" sz="1300" dirty="0"/>
           </a:p>
@@ -35781,7 +35907,7 @@
                   <a:schemeClr val="accent3"/>
                 </a:solidFill>
               </a:rPr>
-              <a:t>Sottotema 13.5  ·  Evoluzione dei ruoli e delle responsabilità professionali</a:t>
+              <a:t>Sottotema 13.5  ·  Evoluzione dei ruoli e delle responsabilità</a:t>
             </a:r>
             <a:endParaRPr lang="en-US" sz="1300" dirty="0"/>
           </a:p>
@@ -37607,7 +37733,7 @@
         </p:nvSpPr>
         <p:spPr>
           <a:xfrm>
-            <a:off x="640080" y="1051560"/>
+            <a:off x="594360" y="1051560"/>
             <a:ext cx="2103120" cy="502920"/>
           </a:xfrm>
           <a:prstGeom prst="rect">
@@ -37643,8 +37769,8 @@
         </p:nvSpPr>
         <p:spPr>
           <a:xfrm>
-            <a:off x="2743200" y="1051560"/>
-            <a:ext cx="5760720" cy="502920"/>
+            <a:off x="2697480" y="1051560"/>
+            <a:ext cx="5852160" cy="502920"/>
           </a:xfrm>
           <a:prstGeom prst="rect">
             <a:avLst/>
@@ -37701,7 +37827,7 @@
         </p:nvSpPr>
         <p:spPr>
           <a:xfrm>
-            <a:off x="640080" y="1627632"/>
+            <a:off x="594360" y="1627632"/>
             <a:ext cx="2103120" cy="502920"/>
           </a:xfrm>
           <a:prstGeom prst="rect">
@@ -37737,8 +37863,8 @@
         </p:nvSpPr>
         <p:spPr>
           <a:xfrm>
-            <a:off x="2743200" y="1627632"/>
-            <a:ext cx="5760720" cy="502920"/>
+            <a:off x="2697480" y="1627632"/>
+            <a:ext cx="5852160" cy="502920"/>
           </a:xfrm>
           <a:prstGeom prst="rect">
             <a:avLst/>
@@ -37795,7 +37921,7 @@
         </p:nvSpPr>
         <p:spPr>
           <a:xfrm>
-            <a:off x="640080" y="2203704"/>
+            <a:off x="594360" y="2203704"/>
             <a:ext cx="2103120" cy="502920"/>
           </a:xfrm>
           <a:prstGeom prst="rect">
@@ -37831,8 +37957,8 @@
         </p:nvSpPr>
         <p:spPr>
           <a:xfrm>
-            <a:off x="2743200" y="2203704"/>
-            <a:ext cx="5760720" cy="502920"/>
+            <a:off x="2697480" y="2203704"/>
+            <a:ext cx="5852160" cy="502920"/>
           </a:xfrm>
           <a:prstGeom prst="rect">
             <a:avLst/>
@@ -37889,7 +38015,7 @@
         </p:nvSpPr>
         <p:spPr>
           <a:xfrm>
-            <a:off x="640080" y="2779776"/>
+            <a:off x="594360" y="2779776"/>
             <a:ext cx="2103120" cy="502920"/>
           </a:xfrm>
           <a:prstGeom prst="rect">
@@ -37925,8 +38051,8 @@
         </p:nvSpPr>
         <p:spPr>
           <a:xfrm>
-            <a:off x="2743200" y="2779776"/>
-            <a:ext cx="5760720" cy="502920"/>
+            <a:off x="2697480" y="2779776"/>
+            <a:ext cx="5852160" cy="502920"/>
           </a:xfrm>
           <a:prstGeom prst="rect">
             <a:avLst/>
@@ -38041,7 +38167,7 @@
                   <a:schemeClr val="tx2"/>
                 </a:solidFill>
               </a:rPr>
-              <a:t>La diffusione nell'organizzazione: Tema 16.</a:t>
+              <a:t>La coerenza tra colleghi va costruita, non si crea da sola.</a:t>
             </a:r>
             <a:endParaRPr lang="en-US" sz="1200" dirty="0"/>
           </a:p>
@@ -39751,7 +39877,7 @@
                   <a:schemeClr val="accent1"/>
                 </a:solidFill>
               </a:rPr>
-              <a:t>Temi 1-4</a:t>
+              <a:t>Che cosa sa fare, dove sbaglia</a:t>
             </a:r>
             <a:endParaRPr lang="en-US" sz="1100" dirty="0"/>
           </a:p>
@@ -39845,7 +39971,7 @@
                   <a:schemeClr val="accent1"/>
                 </a:solidFill>
               </a:rPr>
-              <a:t>Temi 5-6</a:t>
+              <a:t>Che cosa chiedere, e perché</a:t>
             </a:r>
             <a:endParaRPr lang="en-US" sz="1100" dirty="0"/>
           </a:p>
@@ -39939,7 +40065,7 @@
                   <a:schemeClr val="accent1"/>
                 </a:solidFill>
               </a:rPr>
-              <a:t>Tema 7</a:t>
+              <a:t>Fatti, fonti, ragionamenti</a:t>
             </a:r>
             <a:endParaRPr lang="en-US" sz="1100" dirty="0"/>
           </a:p>
@@ -40033,7 +40159,7 @@
                   <a:schemeClr val="accent1"/>
                 </a:solidFill>
               </a:rPr>
-              <a:t>Tema 11</a:t>
+              <a:t>Dove controllare, quanto</a:t>
             </a:r>
             <a:endParaRPr lang="en-US" sz="1100" dirty="0"/>
           </a:p>
@@ -40127,7 +40253,7 @@
                   <a:schemeClr val="accent1"/>
                 </a:solidFill>
               </a:rPr>
-              <a:t>Temi 9, 12</a:t>
+              <a:t>Dare senso ai risultati</a:t>
             </a:r>
             <a:endParaRPr lang="en-US" sz="1100" dirty="0"/>
           </a:p>
@@ -40221,7 +40347,7 @@
                   <a:schemeClr val="accent1"/>
                 </a:solidFill>
               </a:rPr>
-              <a:t>13.4</a:t>
+              <a:t>Distribuire il lavoro</a:t>
             </a:r>
             <a:endParaRPr lang="en-US" sz="1100" dirty="0"/>
           </a:p>
@@ -43775,42 +43901,6 @@
       </p:sp>
       <p:sp>
         <p:nvSpPr>
-          <p:cNvPr id="23" name="Text 19"/>
-          <p:cNvSpPr txBox="1"/>
-          <p:nvPr/>
-        </p:nvSpPr>
-        <p:spPr>
-          <a:xfrm>
-            <a:off x="457200" y="3794760"/>
-            <a:ext cx="8229600" cy="274320"/>
-          </a:xfrm>
-          <a:prstGeom prst="rect">
-            <a:avLst/>
-          </a:prstGeom>
-          <a:noFill/>
-          <a:ln/>
-        </p:spPr>
-        <p:txBody>
-          <a:bodyPr wrap="square" lIns="0" tIns="0" rIns="0" bIns="0" rtlCol="0" anchor="t"/>
-          <a:lstStyle/>
-          <a:p>
-            <a:pPr indent="0" marL="0">
-              <a:buNone/>
-            </a:pPr>
-            <a:r>
-              <a:rPr lang="en-US" sz="1100" i="1" dirty="0">
-                <a:solidFill>
-                  <a:schemeClr val="accent2"/>
-                </a:solidFill>
-              </a:rPr>
-              <a:t>Integrazione C: il paradosso del supervisore inesperto</a:t>
-            </a:r>
-            <a:endParaRPr lang="en-US" sz="1100" dirty="0"/>
-          </a:p>
-        </p:txBody>
-      </p:sp>
-      <p:sp>
-        <p:nvSpPr>
           <p:cNvPr id="25" name="Slide Number Placeholder 0"/>
           <p:cNvSpPr>
             <a:spLocks noGrp="1"/>
@@ -43949,7 +44039,7 @@
                   <a:schemeClr val="accent3"/>
                 </a:solidFill>
               </a:rPr>
-              <a:t>Sottotema 13.7  ·  Competenze e modalità di lavoro nell'era dell'AI</a:t>
+              <a:t>Sottotema 13.7  ·  Competenze e modi di lavorare</a:t>
             </a:r>
             <a:endParaRPr lang="en-US" sz="1300" dirty="0"/>
           </a:p>
@@ -45165,7 +45255,7 @@
                   <a:schemeClr val="tx2"/>
                 </a:solidFill>
               </a:rPr>
-              <a:t>Accompagnare il cambiamento: Tema 16.</a:t>
+              <a:t>La trasformazione va accompagnata: non avviene da sola.</a:t>
             </a:r>
             <a:endParaRPr lang="en-US" sz="1200" dirty="0"/>
           </a:p>
@@ -46807,7 +46897,7 @@
         </p:nvSpPr>
         <p:spPr>
           <a:xfrm>
-            <a:off x="640080" y="1051560"/>
+            <a:off x="594360" y="1051560"/>
             <a:ext cx="2560320" cy="475488"/>
           </a:xfrm>
           <a:prstGeom prst="rect">
@@ -46843,8 +46933,8 @@
         </p:nvSpPr>
         <p:spPr>
           <a:xfrm>
-            <a:off x="3200400" y="1051560"/>
-            <a:ext cx="5303520" cy="475488"/>
+            <a:off x="3154680" y="1051560"/>
+            <a:ext cx="5394960" cy="475488"/>
           </a:xfrm>
           <a:prstGeom prst="rect">
             <a:avLst/>
@@ -46865,7 +46955,7 @@
                   <a:schemeClr val="tx1"/>
                 </a:solidFill>
               </a:rPr>
-              <a:t>Più veloci e più difficili da cambiare (B)</a:t>
+              <a:t>Più veloci e più difficili da cambiare</a:t>
             </a:r>
             <a:endParaRPr lang="en-US" sz="1200" dirty="0"/>
           </a:p>
@@ -46901,7 +46991,7 @@
         </p:nvSpPr>
         <p:spPr>
           <a:xfrm>
-            <a:off x="640080" y="1600200"/>
+            <a:off x="594360" y="1600200"/>
             <a:ext cx="2560320" cy="475488"/>
           </a:xfrm>
           <a:prstGeom prst="rect">
@@ -46937,8 +47027,8 @@
         </p:nvSpPr>
         <p:spPr>
           <a:xfrm>
-            <a:off x="3200400" y="1600200"/>
-            <a:ext cx="5303520" cy="475488"/>
+            <a:off x="3154680" y="1600200"/>
+            <a:ext cx="5394960" cy="475488"/>
           </a:xfrm>
           <a:prstGeom prst="rect">
             <a:avLst/>
@@ -46995,7 +47085,7 @@
         </p:nvSpPr>
         <p:spPr>
           <a:xfrm>
-            <a:off x="640080" y="2148840"/>
+            <a:off x="594360" y="2148840"/>
             <a:ext cx="2560320" cy="475488"/>
           </a:xfrm>
           <a:prstGeom prst="rect">
@@ -47031,8 +47121,8 @@
         </p:nvSpPr>
         <p:spPr>
           <a:xfrm>
-            <a:off x="3200400" y="2148840"/>
-            <a:ext cx="5303520" cy="475488"/>
+            <a:off x="3154680" y="2148840"/>
+            <a:ext cx="5394960" cy="475488"/>
           </a:xfrm>
           <a:prstGeom prst="rect">
             <a:avLst/>
@@ -47089,7 +47179,7 @@
         </p:nvSpPr>
         <p:spPr>
           <a:xfrm>
-            <a:off x="640080" y="2697480"/>
+            <a:off x="594360" y="2697480"/>
             <a:ext cx="2560320" cy="475488"/>
           </a:xfrm>
           <a:prstGeom prst="rect">
@@ -47125,8 +47215,8 @@
         </p:nvSpPr>
         <p:spPr>
           <a:xfrm>
-            <a:off x="3200400" y="2697480"/>
-            <a:ext cx="5303520" cy="475488"/>
+            <a:off x="3154680" y="2697480"/>
+            <a:ext cx="5394960" cy="475488"/>
           </a:xfrm>
           <a:prstGeom prst="rect">
             <a:avLst/>
@@ -47183,7 +47273,7 @@
         </p:nvSpPr>
         <p:spPr>
           <a:xfrm>
-            <a:off x="640080" y="3246120"/>
+            <a:off x="594360" y="3246120"/>
             <a:ext cx="2560320" cy="475488"/>
           </a:xfrm>
           <a:prstGeom prst="rect">
@@ -47219,8 +47309,8 @@
         </p:nvSpPr>
         <p:spPr>
           <a:xfrm>
-            <a:off x="3200400" y="3246120"/>
-            <a:ext cx="5303520" cy="475488"/>
+            <a:off x="3154680" y="3246120"/>
+            <a:ext cx="5394960" cy="475488"/>
           </a:xfrm>
           <a:prstGeom prst="rect">
             <a:avLst/>
@@ -48129,7 +48219,7 @@
                   <a:schemeClr val="tx1"/>
                 </a:solidFill>
               </a:rPr>
-              <a:t>Osservare nel tempo, insieme agli indicatori (Tema 12)</a:t>
+              <a:t>Osservare nel tempo, insieme agli indicatori di risultato</a:t>
             </a:r>
             <a:endParaRPr lang="en-US" sz="1300" dirty="0"/>
           </a:p>
@@ -48187,7 +48277,7 @@
                   <a:schemeClr val="bg1"/>
                 </a:solidFill>
               </a:rPr>
-              <a:t>Il solo modo di sapere che cosa l'AI sta davvero facendo al lavoro. Coinvolgere le persone è il primo passo (Tema 16).</a:t>
+              <a:t>Il solo modo di sapere che cosa l'AI sta davvero facendo al lavoro. Coinvolgere le persone è il primo passo.</a:t>
             </a:r>
             <a:endParaRPr lang="en-US" sz="1300" dirty="0"/>
           </a:p>
@@ -48333,7 +48423,7 @@
                   <a:schemeClr val="accent3"/>
                 </a:solidFill>
               </a:rPr>
-              <a:t>Sottotema 13.8  ·  Condizioni e rischi della trasformazione del lavoro</a:t>
+              <a:t>Sottotema 13.8  ·  Condizioni e rischi della trasformazione</a:t>
             </a:r>
             <a:endParaRPr lang="en-US" sz="1300" dirty="0"/>
           </a:p>
@@ -53285,7 +53375,7 @@
                   <a:schemeClr val="tx1"/>
                 </a:solidFill>
               </a:rPr>
-              <a:t>Che cosa viene dopo</a:t>
+              <a:t>Che cosa evitare</a:t>
             </a:r>
             <a:endParaRPr lang="en-US" sz="2600" dirty="0"/>
           </a:p>
@@ -53293,18 +53383,18 @@
       </p:sp>
       <p:sp>
         <p:nvSpPr>
-          <p:cNvPr id="4" name="aree"/>
-          <p:cNvSpPr/>
-          <p:nvPr/>
-        </p:nvSpPr>
-        <p:spPr>
-          <a:xfrm>
-            <a:off x="457200" y="1097280"/>
-            <a:ext cx="3977640" cy="3429000"/>
+          <p:cNvPr id="4" name="evitare 1"/>
+          <p:cNvSpPr/>
+          <p:nvPr/>
+        </p:nvSpPr>
+        <p:spPr>
+          <a:xfrm>
+            <a:off x="457200" y="1051560"/>
+            <a:ext cx="4023360" cy="1024128"/>
           </a:xfrm>
           <a:prstGeom prst="roundRect">
             <a:avLst>
-              <a:gd name="adj" fmla="val 2133"/>
+              <a:gd name="adj" fmla="val 7143"/>
             </a:avLst>
           </a:prstGeom>
           <a:solidFill>
@@ -53315,14 +53405,94 @@
       </p:sp>
       <p:sp>
         <p:nvSpPr>
-          <p:cNvPr id="5" name="Text 2"/>
-          <p:cNvSpPr txBox="1"/>
-          <p:nvPr/>
-        </p:nvSpPr>
-        <p:spPr>
-          <a:xfrm>
-            <a:off x="685800" y="1261872"/>
-            <a:ext cx="3566160" cy="274320"/>
+          <p:cNvPr id="5" name="cerchio FiMail"/>
+          <p:cNvSpPr/>
+          <p:nvPr/>
+        </p:nvSpPr>
+        <p:spPr>
+          <a:xfrm>
+            <a:off x="621792" y="1216152"/>
+            <a:ext cx="457200" cy="457200"/>
+          </a:xfrm>
+          <a:prstGeom prst="ellipse">
+            <a:avLst/>
+          </a:prstGeom>
+          <a:solidFill>
+            <a:schemeClr val="accent5"/>
+          </a:solidFill>
+          <a:ln/>
+        </p:spPr>
+      </p:sp>
+      <p:pic>
+        <p:nvPicPr>
+          <p:cNvPr id="6" name="Image 0" descr="FiMail">    </p:cNvPr>
+          <p:cNvPicPr>
+            <a:picLocks noChangeAspect="1"/>
+          </p:cNvPicPr>
+          <p:nvPr/>
+        </p:nvPicPr>
+        <p:blipFill>
+          <a:blip r:embed="rId1"/>
+          <a:stretch>
+            <a:fillRect/>
+          </a:stretch>
+        </p:blipFill>
+        <p:spPr>
+          <a:xfrm>
+            <a:off x="736092" y="1330452"/>
+            <a:ext cx="228600" cy="228600"/>
+          </a:xfrm>
+          <a:prstGeom prst="rect">
+            <a:avLst/>
+          </a:prstGeom>
+        </p:spPr>
+      </p:pic>
+      <p:sp>
+        <p:nvSpPr>
+          <p:cNvPr id="7" name="Text 3"/>
+          <p:cNvSpPr txBox="1"/>
+          <p:nvPr/>
+        </p:nvSpPr>
+        <p:spPr>
+          <a:xfrm>
+            <a:off x="1188720" y="1143000"/>
+            <a:ext cx="2697480" cy="502920"/>
+          </a:xfrm>
+          <a:prstGeom prst="rect">
+            <a:avLst/>
+          </a:prstGeom>
+          <a:noFill/>
+          <a:ln/>
+        </p:spPr>
+        <p:txBody>
+          <a:bodyPr wrap="square" lIns="0" tIns="0" rIns="0" bIns="0" rtlCol="0" anchor="ctr"/>
+          <a:lstStyle/>
+          <a:p>
+            <a:pPr indent="0" marL="0">
+              <a:buNone/>
+            </a:pPr>
+            <a:r>
+              <a:rPr lang="en-US" sz="1300" b="1" dirty="0">
+                <a:solidFill>
+                  <a:schemeClr val="tx1"/>
+                </a:solidFill>
+              </a:rPr>
+              <a:t>"Scrive email: gli addetti spariranno"</a:t>
+            </a:r>
+            <a:endParaRPr lang="en-US" sz="1300" dirty="0"/>
+          </a:p>
+        </p:txBody>
+      </p:sp>
+      <p:sp>
+        <p:nvSpPr>
+          <p:cNvPr id="8" name="Text 4"/>
+          <p:cNvSpPr txBox="1"/>
+          <p:nvPr/>
+        </p:nvSpPr>
+        <p:spPr>
+          <a:xfrm>
+            <a:off x="1188720" y="1655064"/>
+            <a:ext cx="2743200" cy="347472"/>
           </a:xfrm>
           <a:prstGeom prst="rect">
             <a:avLst/>
@@ -53338,12 +53508,12 @@
               <a:buNone/>
             </a:pPr>
             <a:r>
-              <a:rPr lang="en-US" sz="1200" b="1" spc="200" kern="0" dirty="0">
-                <a:solidFill>
-                  <a:schemeClr val="accent2"/>
-                </a:solidFill>
-              </a:rPr>
-              <a:t>PERCORSO</a:t>
+              <a:rPr lang="en-US" sz="1200" dirty="0">
+                <a:solidFill>
+                  <a:schemeClr val="tx2"/>
+                </a:solidFill>
+              </a:rPr>
+              <a:t>Un compito non è il ruolo</a:t>
             </a:r>
             <a:endParaRPr lang="en-US" sz="1200" dirty="0"/>
           </a:p>
@@ -53351,14 +53521,14 @@
       </p:sp>
       <p:sp>
         <p:nvSpPr>
-          <p:cNvPr id="6" name="Text 3"/>
-          <p:cNvSpPr txBox="1"/>
-          <p:nvPr/>
-        </p:nvSpPr>
-        <p:spPr>
-          <a:xfrm>
-            <a:off x="685800" y="1572768"/>
-            <a:ext cx="3566160" cy="292608"/>
+          <p:cNvPr id="9" name="Text 5"/>
+          <p:cNvSpPr txBox="1"/>
+          <p:nvPr/>
+        </p:nvSpPr>
+        <p:spPr>
+          <a:xfrm>
+            <a:off x="3840480" y="1143000"/>
+            <a:ext cx="502920" cy="365760"/>
           </a:xfrm>
           <a:prstGeom prst="rect">
             <a:avLst/>
@@ -53370,305 +53540,133 @@
           <a:bodyPr wrap="square" lIns="0" tIns="0" rIns="0" bIns="0" rtlCol="0" anchor="t"/>
           <a:lstStyle/>
           <a:p>
-            <a:pPr indent="0" marL="0">
-              <a:buNone/>
-            </a:pPr>
-            <a:r>
-              <a:rPr lang="en-US" sz="1400" b="1" dirty="0">
-                <a:solidFill>
-                  <a:schemeClr val="tx1"/>
-                </a:solidFill>
-              </a:rPr>
-              <a:t>Comprendere l'AI</a:t>
-            </a:r>
-            <a:endParaRPr lang="en-US" sz="1400" dirty="0"/>
-          </a:p>
-        </p:txBody>
-      </p:sp>
-      <p:sp>
-        <p:nvSpPr>
-          <p:cNvPr id="7" name="Text 4"/>
-          <p:cNvSpPr txBox="1"/>
-          <p:nvPr/>
-        </p:nvSpPr>
-        <p:spPr>
-          <a:xfrm>
-            <a:off x="685800" y="1856232"/>
-            <a:ext cx="3566160" cy="274320"/>
-          </a:xfrm>
-          <a:prstGeom prst="rect">
-            <a:avLst/>
-          </a:prstGeom>
-          <a:noFill/>
-          <a:ln/>
-        </p:spPr>
-        <p:txBody>
-          <a:bodyPr wrap="square" lIns="0" tIns="0" rIns="0" bIns="0" rtlCol="0" anchor="t"/>
-          <a:lstStyle/>
-          <a:p>
-            <a:pPr indent="0" marL="0">
-              <a:buNone/>
-            </a:pPr>
-            <a:r>
-              <a:rPr lang="en-US" sz="1200" dirty="0">
-                <a:solidFill>
-                  <a:schemeClr val="tx2"/>
-                </a:solidFill>
-              </a:rPr>
-              <a:t>Temi 1-4</a:t>
-            </a:r>
-            <a:endParaRPr lang="en-US" sz="1200" dirty="0"/>
-          </a:p>
-        </p:txBody>
-      </p:sp>
-      <p:sp>
-        <p:nvSpPr>
-          <p:cNvPr id="8" name="Text 5"/>
-          <p:cNvSpPr txBox="1"/>
-          <p:nvPr/>
-        </p:nvSpPr>
-        <p:spPr>
-          <a:xfrm>
-            <a:off x="685800" y="2194560"/>
-            <a:ext cx="3566160" cy="292608"/>
-          </a:xfrm>
-          <a:prstGeom prst="rect">
-            <a:avLst/>
-          </a:prstGeom>
-          <a:noFill/>
-          <a:ln/>
-        </p:spPr>
-        <p:txBody>
-          <a:bodyPr wrap="square" lIns="0" tIns="0" rIns="0" bIns="0" rtlCol="0" anchor="t"/>
-          <a:lstStyle/>
-          <a:p>
-            <a:pPr indent="0" marL="0">
-              <a:buNone/>
-            </a:pPr>
-            <a:r>
-              <a:rPr lang="en-US" sz="1400" b="1" dirty="0">
-                <a:solidFill>
-                  <a:schemeClr val="tx1"/>
-                </a:solidFill>
-              </a:rPr>
-              <a:t>Interagire con l'AI</a:t>
-            </a:r>
-            <a:endParaRPr lang="en-US" sz="1400" dirty="0"/>
-          </a:p>
-        </p:txBody>
-      </p:sp>
-      <p:sp>
-        <p:nvSpPr>
-          <p:cNvPr id="9" name="Text 6"/>
-          <p:cNvSpPr txBox="1"/>
-          <p:nvPr/>
-        </p:nvSpPr>
-        <p:spPr>
-          <a:xfrm>
-            <a:off x="685800" y="2478024"/>
-            <a:ext cx="3566160" cy="274320"/>
-          </a:xfrm>
-          <a:prstGeom prst="rect">
-            <a:avLst/>
-          </a:prstGeom>
-          <a:noFill/>
-          <a:ln/>
-        </p:spPr>
-        <p:txBody>
-          <a:bodyPr wrap="square" lIns="0" tIns="0" rIns="0" bIns="0" rtlCol="0" anchor="t"/>
-          <a:lstStyle/>
-          <a:p>
-            <a:pPr indent="0" marL="0">
-              <a:buNone/>
-            </a:pPr>
-            <a:r>
-              <a:rPr lang="en-US" sz="1200" dirty="0">
-                <a:solidFill>
-                  <a:schemeClr val="tx2"/>
-                </a:solidFill>
-              </a:rPr>
-              <a:t>Temi 5-7</a:t>
-            </a:r>
-            <a:endParaRPr lang="en-US" sz="1200" dirty="0"/>
-          </a:p>
-        </p:txBody>
-      </p:sp>
-      <p:sp>
-        <p:nvSpPr>
-          <p:cNvPr id="10" name="Text 7"/>
-          <p:cNvSpPr txBox="1"/>
-          <p:nvPr/>
-        </p:nvSpPr>
-        <p:spPr>
-          <a:xfrm>
-            <a:off x="685800" y="2816352"/>
-            <a:ext cx="3566160" cy="292608"/>
-          </a:xfrm>
-          <a:prstGeom prst="rect">
-            <a:avLst/>
-          </a:prstGeom>
-          <a:noFill/>
-          <a:ln/>
-        </p:spPr>
-        <p:txBody>
-          <a:bodyPr wrap="square" lIns="0" tIns="0" rIns="0" bIns="0" rtlCol="0" anchor="t"/>
-          <a:lstStyle/>
-          <a:p>
-            <a:pPr indent="0" marL="0">
-              <a:buNone/>
-            </a:pPr>
-            <a:r>
-              <a:rPr lang="en-US" sz="1400" b="1" dirty="0">
-                <a:solidFill>
-                  <a:schemeClr val="tx1"/>
-                </a:solidFill>
-              </a:rPr>
-              <a:t>Esplorare le possibilità dell'AI</a:t>
-            </a:r>
-            <a:endParaRPr lang="en-US" sz="1400" dirty="0"/>
-          </a:p>
-        </p:txBody>
-      </p:sp>
-      <p:sp>
-        <p:nvSpPr>
-          <p:cNvPr id="11" name="Text 8"/>
-          <p:cNvSpPr txBox="1"/>
-          <p:nvPr/>
-        </p:nvSpPr>
-        <p:spPr>
-          <a:xfrm>
-            <a:off x="685800" y="3099816"/>
-            <a:ext cx="3566160" cy="274320"/>
-          </a:xfrm>
-          <a:prstGeom prst="rect">
-            <a:avLst/>
-          </a:prstGeom>
-          <a:noFill/>
-          <a:ln/>
-        </p:spPr>
-        <p:txBody>
-          <a:bodyPr wrap="square" lIns="0" tIns="0" rIns="0" bIns="0" rtlCol="0" anchor="t"/>
-          <a:lstStyle/>
-          <a:p>
-            <a:pPr indent="0" marL="0">
-              <a:buNone/>
-            </a:pPr>
-            <a:r>
-              <a:rPr lang="en-US" sz="1200" dirty="0">
-                <a:solidFill>
-                  <a:schemeClr val="tx2"/>
-                </a:solidFill>
-              </a:rPr>
-              <a:t>Temi 8-11</a:t>
-            </a:r>
-            <a:endParaRPr lang="en-US" sz="1200" dirty="0"/>
-          </a:p>
-        </p:txBody>
-      </p:sp>
-      <p:sp>
-        <p:nvSpPr>
-          <p:cNvPr id="12" name="Text 9"/>
-          <p:cNvSpPr txBox="1"/>
-          <p:nvPr/>
-        </p:nvSpPr>
-        <p:spPr>
-          <a:xfrm>
-            <a:off x="685800" y="3438144"/>
-            <a:ext cx="3566160" cy="292608"/>
-          </a:xfrm>
-          <a:prstGeom prst="rect">
-            <a:avLst/>
-          </a:prstGeom>
-          <a:noFill/>
-          <a:ln/>
-        </p:spPr>
-        <p:txBody>
-          <a:bodyPr wrap="square" lIns="0" tIns="0" rIns="0" bIns="0" rtlCol="0" anchor="t"/>
-          <a:lstStyle/>
-          <a:p>
-            <a:pPr indent="0" marL="0">
-              <a:buNone/>
-            </a:pPr>
-            <a:r>
-              <a:rPr lang="en-US" sz="1400" b="1" dirty="0">
+            <a:pPr algn="r" indent="0" marL="0">
+              <a:buNone/>
+            </a:pPr>
+            <a:r>
+              <a:rPr lang="en-US" sz="1100" b="1" dirty="0">
                 <a:solidFill>
                   <a:schemeClr val="accent1"/>
                 </a:solidFill>
               </a:rPr>
-              <a:t>Comprendere il valore per l'azienda</a:t>
-            </a:r>
-            <a:endParaRPr lang="en-US" sz="1400" dirty="0"/>
-          </a:p>
-        </p:txBody>
-      </p:sp>
-      <p:sp>
-        <p:nvSpPr>
-          <p:cNvPr id="13" name="Text 10"/>
-          <p:cNvSpPr txBox="1"/>
-          <p:nvPr/>
-        </p:nvSpPr>
-        <p:spPr>
-          <a:xfrm>
-            <a:off x="685800" y="3721608"/>
-            <a:ext cx="3566160" cy="502920"/>
-          </a:xfrm>
-          <a:prstGeom prst="rect">
-            <a:avLst/>
-          </a:prstGeom>
-          <a:noFill/>
-          <a:ln/>
-        </p:spPr>
-        <p:txBody>
-          <a:bodyPr wrap="square" lIns="0" tIns="0" rIns="0" bIns="0" rtlCol="0" anchor="t"/>
-          <a:lstStyle/>
-          <a:p>
-            <a:pPr indent="0" marL="0">
-              <a:buNone/>
-            </a:pPr>
-            <a:r>
-              <a:rPr lang="en-US" sz="1200" dirty="0">
-                <a:solidFill>
-                  <a:schemeClr val="tx2"/>
-                </a:solidFill>
-              </a:rPr>
-              <a:t>Tema 12: valore; Tema 13: lavoro e processi (completato)</a:t>
-            </a:r>
-            <a:endParaRPr lang="en-US" sz="1200" dirty="0"/>
-          </a:p>
-        </p:txBody>
-      </p:sp>
-      <p:sp>
-        <p:nvSpPr>
-          <p:cNvPr id="14" name="prossimi"/>
-          <p:cNvSpPr/>
-          <p:nvPr/>
-        </p:nvSpPr>
-        <p:spPr>
-          <a:xfrm>
-            <a:off x="4709160" y="1097280"/>
-            <a:ext cx="3977640" cy="3429000"/>
+              <a:t>13.1</a:t>
+            </a:r>
+            <a:endParaRPr lang="en-US" sz="1100" dirty="0"/>
+          </a:p>
+        </p:txBody>
+      </p:sp>
+      <p:sp>
+        <p:nvSpPr>
+          <p:cNvPr id="10" name="evitare 2"/>
+          <p:cNvSpPr/>
+          <p:nvPr/>
+        </p:nvSpPr>
+        <p:spPr>
+          <a:xfrm>
+            <a:off x="4663440" y="1051560"/>
+            <a:ext cx="4023360" cy="1024128"/>
           </a:xfrm>
           <a:prstGeom prst="roundRect">
             <a:avLst>
-              <a:gd name="adj" fmla="val 2133"/>
+              <a:gd name="adj" fmla="val 7143"/>
             </a:avLst>
           </a:prstGeom>
           <a:solidFill>
-            <a:schemeClr val="tx1"/>
+            <a:schemeClr val="bg2"/>
           </a:solidFill>
           <a:ln/>
         </p:spPr>
       </p:sp>
       <p:sp>
         <p:nvSpPr>
-          <p:cNvPr id="15" name="Text 12"/>
-          <p:cNvSpPr txBox="1"/>
-          <p:nvPr/>
-        </p:nvSpPr>
-        <p:spPr>
-          <a:xfrm>
-            <a:off x="4937760" y="1261872"/>
-            <a:ext cx="3566160" cy="274320"/>
+          <p:cNvPr id="11" name="cerchio FiPercent"/>
+          <p:cNvSpPr/>
+          <p:nvPr/>
+        </p:nvSpPr>
+        <p:spPr>
+          <a:xfrm>
+            <a:off x="4828032" y="1216152"/>
+            <a:ext cx="457200" cy="457200"/>
+          </a:xfrm>
+          <a:prstGeom prst="ellipse">
+            <a:avLst/>
+          </a:prstGeom>
+          <a:solidFill>
+            <a:schemeClr val="accent5"/>
+          </a:solidFill>
+          <a:ln/>
+        </p:spPr>
+      </p:sp>
+      <p:pic>
+        <p:nvPicPr>
+          <p:cNvPr id="12" name="Image 1" descr="FiPercent">    </p:cNvPr>
+          <p:cNvPicPr>
+            <a:picLocks noChangeAspect="1"/>
+          </p:cNvPicPr>
+          <p:nvPr/>
+        </p:nvPicPr>
+        <p:blipFill>
+          <a:blip r:embed="rId2"/>
+          <a:stretch>
+            <a:fillRect/>
+          </a:stretch>
+        </p:blipFill>
+        <p:spPr>
+          <a:xfrm>
+            <a:off x="4942332" y="1330452"/>
+            <a:ext cx="228600" cy="228600"/>
+          </a:xfrm>
+          <a:prstGeom prst="rect">
+            <a:avLst/>
+          </a:prstGeom>
+        </p:spPr>
+      </p:pic>
+      <p:sp>
+        <p:nvSpPr>
+          <p:cNvPr id="13" name="Text 8"/>
+          <p:cNvSpPr txBox="1"/>
+          <p:nvPr/>
+        </p:nvSpPr>
+        <p:spPr>
+          <a:xfrm>
+            <a:off x="5394960" y="1143000"/>
+            <a:ext cx="2697480" cy="502920"/>
+          </a:xfrm>
+          <a:prstGeom prst="rect">
+            <a:avLst/>
+          </a:prstGeom>
+          <a:noFill/>
+          <a:ln/>
+        </p:spPr>
+        <p:txBody>
+          <a:bodyPr wrap="square" lIns="0" tIns="0" rIns="0" bIns="0" rtlCol="0" anchor="ctr"/>
+          <a:lstStyle/>
+          <a:p>
+            <a:pPr indent="0" marL="0">
+              <a:buNone/>
+            </a:pPr>
+            <a:r>
+              <a:rPr lang="en-US" sz="1300" b="1" dirty="0">
+                <a:solidFill>
+                  <a:schemeClr val="tx1"/>
+                </a:solidFill>
+              </a:rPr>
+              <a:t>"È esposto, quindi sarà sostituito"</a:t>
+            </a:r>
+            <a:endParaRPr lang="en-US" sz="1300" dirty="0"/>
+          </a:p>
+        </p:txBody>
+      </p:sp>
+      <p:sp>
+        <p:nvSpPr>
+          <p:cNvPr id="14" name="Text 9"/>
+          <p:cNvSpPr txBox="1"/>
+          <p:nvPr/>
+        </p:nvSpPr>
+        <p:spPr>
+          <a:xfrm>
+            <a:off x="5394960" y="1655064"/>
+            <a:ext cx="2743200" cy="347472"/>
           </a:xfrm>
           <a:prstGeom prst="rect">
             <a:avLst/>
@@ -53684,12 +53682,186 @@
               <a:buNone/>
             </a:pPr>
             <a:r>
-              <a:rPr lang="en-US" sz="1200" b="1" spc="200" kern="0" dirty="0">
+              <a:rPr lang="en-US" sz="1200" dirty="0">
+                <a:solidFill>
+                  <a:schemeClr val="tx2"/>
+                </a:solidFill>
+              </a:rPr>
+              <a:t>Esposizione non è sostituzione</a:t>
+            </a:r>
+            <a:endParaRPr lang="en-US" sz="1200" dirty="0"/>
+          </a:p>
+        </p:txBody>
+      </p:sp>
+      <p:sp>
+        <p:nvSpPr>
+          <p:cNvPr id="15" name="Text 10"/>
+          <p:cNvSpPr txBox="1"/>
+          <p:nvPr/>
+        </p:nvSpPr>
+        <p:spPr>
+          <a:xfrm>
+            <a:off x="8046720" y="1143000"/>
+            <a:ext cx="502920" cy="365760"/>
+          </a:xfrm>
+          <a:prstGeom prst="rect">
+            <a:avLst/>
+          </a:prstGeom>
+          <a:noFill/>
+          <a:ln/>
+        </p:spPr>
+        <p:txBody>
+          <a:bodyPr wrap="square" lIns="0" tIns="0" rIns="0" bIns="0" rtlCol="0" anchor="t"/>
+          <a:lstStyle/>
+          <a:p>
+            <a:pPr algn="r" indent="0" marL="0">
+              <a:buNone/>
+            </a:pPr>
+            <a:r>
+              <a:rPr lang="en-US" sz="1100" b="1" dirty="0">
                 <a:solidFill>
                   <a:schemeClr val="accent1"/>
                 </a:solidFill>
               </a:rPr>
-              <a:t>PROSSIMO TEMA</a:t>
+              <a:t>13.1</a:t>
+            </a:r>
+            <a:endParaRPr lang="en-US" sz="1100" dirty="0"/>
+          </a:p>
+        </p:txBody>
+      </p:sp>
+      <p:sp>
+        <p:nvSpPr>
+          <p:cNvPr id="16" name="evitare 3"/>
+          <p:cNvSpPr/>
+          <p:nvPr/>
+        </p:nvSpPr>
+        <p:spPr>
+          <a:xfrm>
+            <a:off x="457200" y="2212848"/>
+            <a:ext cx="4023360" cy="1024128"/>
+          </a:xfrm>
+          <a:prstGeom prst="roundRect">
+            <a:avLst>
+              <a:gd name="adj" fmla="val 7143"/>
+            </a:avLst>
+          </a:prstGeom>
+          <a:solidFill>
+            <a:schemeClr val="accent6"/>
+          </a:solidFill>
+          <a:ln/>
+        </p:spPr>
+      </p:sp>
+      <p:sp>
+        <p:nvSpPr>
+          <p:cNvPr id="17" name="cerchio FiShuffle"/>
+          <p:cNvSpPr/>
+          <p:nvPr/>
+        </p:nvSpPr>
+        <p:spPr>
+          <a:xfrm>
+            <a:off x="621792" y="2377440"/>
+            <a:ext cx="457200" cy="457200"/>
+          </a:xfrm>
+          <a:prstGeom prst="ellipse">
+            <a:avLst/>
+          </a:prstGeom>
+          <a:solidFill>
+            <a:schemeClr val="accent5"/>
+          </a:solidFill>
+          <a:ln/>
+        </p:spPr>
+      </p:sp>
+      <p:pic>
+        <p:nvPicPr>
+          <p:cNvPr id="18" name="Image 2" descr="FiShuffle">    </p:cNvPr>
+          <p:cNvPicPr>
+            <a:picLocks noChangeAspect="1"/>
+          </p:cNvPicPr>
+          <p:nvPr/>
+        </p:nvPicPr>
+        <p:blipFill>
+          <a:blip r:embed="rId3"/>
+          <a:stretch>
+            <a:fillRect/>
+          </a:stretch>
+        </p:blipFill>
+        <p:spPr>
+          <a:xfrm>
+            <a:off x="736092" y="2491740"/>
+            <a:ext cx="228600" cy="228600"/>
+          </a:xfrm>
+          <a:prstGeom prst="rect">
+            <a:avLst/>
+          </a:prstGeom>
+        </p:spPr>
+      </p:pic>
+      <p:sp>
+        <p:nvSpPr>
+          <p:cNvPr id="19" name="Text 13"/>
+          <p:cNvSpPr txBox="1"/>
+          <p:nvPr/>
+        </p:nvSpPr>
+        <p:spPr>
+          <a:xfrm>
+            <a:off x="1188720" y="2304288"/>
+            <a:ext cx="2697480" cy="502920"/>
+          </a:xfrm>
+          <a:prstGeom prst="rect">
+            <a:avLst/>
+          </a:prstGeom>
+          <a:noFill/>
+          <a:ln/>
+        </p:spPr>
+        <p:txBody>
+          <a:bodyPr wrap="square" lIns="0" tIns="0" rIns="0" bIns="0" rtlCol="0" anchor="ctr"/>
+          <a:lstStyle/>
+          <a:p>
+            <a:pPr indent="0" marL="0">
+              <a:buNone/>
+            </a:pPr>
+            <a:r>
+              <a:rPr lang="en-US" sz="1300" b="1" dirty="0">
+                <a:solidFill>
+                  <a:schemeClr val="tx1"/>
+                </a:solidFill>
+              </a:rPr>
+              <a:t>"Mettiamo l'AI nel processo attuale"</a:t>
+            </a:r>
+            <a:endParaRPr lang="en-US" sz="1300" dirty="0"/>
+          </a:p>
+        </p:txBody>
+      </p:sp>
+      <p:sp>
+        <p:nvSpPr>
+          <p:cNvPr id="20" name="Text 14"/>
+          <p:cNvSpPr txBox="1"/>
+          <p:nvPr/>
+        </p:nvSpPr>
+        <p:spPr>
+          <a:xfrm>
+            <a:off x="1188720" y="2816352"/>
+            <a:ext cx="2743200" cy="347472"/>
+          </a:xfrm>
+          <a:prstGeom prst="rect">
+            <a:avLst/>
+          </a:prstGeom>
+          <a:noFill/>
+          <a:ln/>
+        </p:spPr>
+        <p:txBody>
+          <a:bodyPr wrap="square" lIns="0" tIns="0" rIns="0" bIns="0" rtlCol="0" anchor="t"/>
+          <a:lstStyle/>
+          <a:p>
+            <a:pPr indent="0" marL="0">
+              <a:buNone/>
+            </a:pPr>
+            <a:r>
+              <a:rPr lang="en-US" sz="1200" dirty="0">
+                <a:solidFill>
+                  <a:schemeClr val="tx2"/>
+                </a:solidFill>
+              </a:rPr>
+              <a:t>Si automatizza l'inefficienza</a:t>
             </a:r>
             <a:endParaRPr lang="en-US" sz="1200" dirty="0"/>
           </a:p>
@@ -53697,14 +53869,14 @@
       </p:sp>
       <p:sp>
         <p:nvSpPr>
-          <p:cNvPr id="16" name="Text 13"/>
-          <p:cNvSpPr txBox="1"/>
-          <p:nvPr/>
-        </p:nvSpPr>
-        <p:spPr>
-          <a:xfrm>
-            <a:off x="4937760" y="1572768"/>
-            <a:ext cx="3566160" cy="594360"/>
+          <p:cNvPr id="21" name="Text 15"/>
+          <p:cNvSpPr txBox="1"/>
+          <p:nvPr/>
+        </p:nvSpPr>
+        <p:spPr>
+          <a:xfrm>
+            <a:off x="3840480" y="2304288"/>
+            <a:ext cx="502920" cy="365760"/>
           </a:xfrm>
           <a:prstGeom prst="rect">
             <a:avLst/>
@@ -53716,31 +53888,133 @@
           <a:bodyPr wrap="square" lIns="0" tIns="0" rIns="0" bIns="0" rtlCol="0" anchor="t"/>
           <a:lstStyle/>
           <a:p>
+            <a:pPr algn="r" indent="0" marL="0">
+              <a:buNone/>
+            </a:pPr>
+            <a:r>
+              <a:rPr lang="en-US" sz="1100" b="1" dirty="0">
+                <a:solidFill>
+                  <a:schemeClr val="accent1"/>
+                </a:solidFill>
+              </a:rPr>
+              <a:t>13.3</a:t>
+            </a:r>
+            <a:endParaRPr lang="en-US" sz="1100" dirty="0"/>
+          </a:p>
+        </p:txBody>
+      </p:sp>
+      <p:sp>
+        <p:nvSpPr>
+          <p:cNvPr id="22" name="evitare 4"/>
+          <p:cNvSpPr/>
+          <p:nvPr/>
+        </p:nvSpPr>
+        <p:spPr>
+          <a:xfrm>
+            <a:off x="4663440" y="2212848"/>
+            <a:ext cx="4023360" cy="1024128"/>
+          </a:xfrm>
+          <a:prstGeom prst="roundRect">
+            <a:avLst>
+              <a:gd name="adj" fmla="val 7143"/>
+            </a:avLst>
+          </a:prstGeom>
+          <a:solidFill>
+            <a:schemeClr val="accent6"/>
+          </a:solidFill>
+          <a:ln/>
+        </p:spPr>
+      </p:sp>
+      <p:sp>
+        <p:nvSpPr>
+          <p:cNvPr id="23" name="cerchio FiGrid"/>
+          <p:cNvSpPr/>
+          <p:nvPr/>
+        </p:nvSpPr>
+        <p:spPr>
+          <a:xfrm>
+            <a:off x="4828032" y="2377440"/>
+            <a:ext cx="457200" cy="457200"/>
+          </a:xfrm>
+          <a:prstGeom prst="ellipse">
+            <a:avLst/>
+          </a:prstGeom>
+          <a:solidFill>
+            <a:schemeClr val="accent5"/>
+          </a:solidFill>
+          <a:ln/>
+        </p:spPr>
+      </p:sp>
+      <p:pic>
+        <p:nvPicPr>
+          <p:cNvPr id="24" name="Image 3" descr="FiGrid">    </p:cNvPr>
+          <p:cNvPicPr>
+            <a:picLocks noChangeAspect="1"/>
+          </p:cNvPicPr>
+          <p:nvPr/>
+        </p:nvPicPr>
+        <p:blipFill>
+          <a:blip r:embed="rId4"/>
+          <a:stretch>
+            <a:fillRect/>
+          </a:stretch>
+        </p:blipFill>
+        <p:spPr>
+          <a:xfrm>
+            <a:off x="4942332" y="2491740"/>
+            <a:ext cx="228600" cy="228600"/>
+          </a:xfrm>
+          <a:prstGeom prst="rect">
+            <a:avLst/>
+          </a:prstGeom>
+        </p:spPr>
+      </p:pic>
+      <p:sp>
+        <p:nvSpPr>
+          <p:cNvPr id="25" name="Text 18"/>
+          <p:cNvSpPr txBox="1"/>
+          <p:nvPr/>
+        </p:nvSpPr>
+        <p:spPr>
+          <a:xfrm>
+            <a:off x="5394960" y="2304288"/>
+            <a:ext cx="2697480" cy="502920"/>
+          </a:xfrm>
+          <a:prstGeom prst="rect">
+            <a:avLst/>
+          </a:prstGeom>
+          <a:noFill/>
+          <a:ln/>
+        </p:spPr>
+        <p:txBody>
+          <a:bodyPr wrap="square" lIns="0" tIns="0" rIns="0" bIns="0" rtlCol="0" anchor="ctr"/>
+          <a:lstStyle/>
+          <a:p>
             <a:pPr indent="0" marL="0">
               <a:buNone/>
             </a:pPr>
             <a:r>
-              <a:rPr lang="en-US" sz="1500" b="1" dirty="0">
-                <a:solidFill>
-                  <a:schemeClr val="bg1"/>
-                </a:solidFill>
-              </a:rPr>
-              <a:t>Tema 14: AI, dati e conoscenza aziendale</a:t>
-            </a:r>
-            <a:endParaRPr lang="en-US" sz="1500" dirty="0"/>
-          </a:p>
-        </p:txBody>
-      </p:sp>
-      <p:sp>
-        <p:nvSpPr>
-          <p:cNvPr id="17" name="Text 14"/>
-          <p:cNvSpPr txBox="1"/>
-          <p:nvPr/>
-        </p:nvSpPr>
-        <p:spPr>
-          <a:xfrm>
-            <a:off x="4937760" y="2194560"/>
-            <a:ext cx="3566160" cy="457200"/>
+              <a:rPr lang="en-US" sz="1300" b="1" dirty="0">
+                <a:solidFill>
+                  <a:schemeClr val="tx1"/>
+                </a:solidFill>
+              </a:rPr>
+              <a:t>"Ognuno usa lo strumento che vuole"</a:t>
+            </a:r>
+            <a:endParaRPr lang="en-US" sz="1300" dirty="0"/>
+          </a:p>
+        </p:txBody>
+      </p:sp>
+      <p:sp>
+        <p:nvSpPr>
+          <p:cNvPr id="26" name="Text 19"/>
+          <p:cNvSpPr txBox="1"/>
+          <p:nvPr/>
+        </p:nvSpPr>
+        <p:spPr>
+          <a:xfrm>
+            <a:off x="5394960" y="2816352"/>
+            <a:ext cx="2743200" cy="347472"/>
           </a:xfrm>
           <a:prstGeom prst="rect">
             <a:avLst/>
@@ -53756,12 +54030,12 @@
               <a:buNone/>
             </a:pPr>
             <a:r>
-              <a:rPr lang="en-US" sz="1200" i="1" dirty="0">
-                <a:solidFill>
-                  <a:schemeClr val="accent3"/>
-                </a:solidFill>
-              </a:rPr>
-              <a:t>Patrimonio informativo, qualità, accessi, affidabilità</a:t>
+              <a:rPr lang="en-US" sz="1200" dirty="0">
+                <a:solidFill>
+                  <a:schemeClr val="tx2"/>
+                </a:solidFill>
+              </a:rPr>
+              <a:t>Servono regole comuni nel team</a:t>
             </a:r>
             <a:endParaRPr lang="en-US" sz="1200" dirty="0"/>
           </a:p>
@@ -53769,14 +54043,14 @@
       </p:sp>
       <p:sp>
         <p:nvSpPr>
-          <p:cNvPr id="18" name="Text 15"/>
-          <p:cNvSpPr txBox="1"/>
-          <p:nvPr/>
-        </p:nvSpPr>
-        <p:spPr>
-          <a:xfrm>
-            <a:off x="4937760" y="2743200"/>
-            <a:ext cx="3566160" cy="274320"/>
+          <p:cNvPr id="27" name="Text 20"/>
+          <p:cNvSpPr txBox="1"/>
+          <p:nvPr/>
+        </p:nvSpPr>
+        <p:spPr>
+          <a:xfrm>
+            <a:off x="8046720" y="2304288"/>
+            <a:ext cx="502920" cy="365760"/>
           </a:xfrm>
           <a:prstGeom prst="rect">
             <a:avLst/>
@@ -53788,16 +54062,328 @@
           <a:bodyPr wrap="square" lIns="0" tIns="0" rIns="0" bIns="0" rtlCol="0" anchor="t"/>
           <a:lstStyle/>
           <a:p>
+            <a:pPr algn="r" indent="0" marL="0">
+              <a:buNone/>
+            </a:pPr>
+            <a:r>
+              <a:rPr lang="en-US" sz="1100" b="1" dirty="0">
+                <a:solidFill>
+                  <a:schemeClr val="accent1"/>
+                </a:solidFill>
+              </a:rPr>
+              <a:t>13.6</a:t>
+            </a:r>
+            <a:endParaRPr lang="en-US" sz="1100" dirty="0"/>
+          </a:p>
+        </p:txBody>
+      </p:sp>
+      <p:sp>
+        <p:nvSpPr>
+          <p:cNvPr id="28" name="evitare 5"/>
+          <p:cNvSpPr/>
+          <p:nvPr/>
+        </p:nvSpPr>
+        <p:spPr>
+          <a:xfrm>
+            <a:off x="457200" y="3374136"/>
+            <a:ext cx="4023360" cy="1024128"/>
+          </a:xfrm>
+          <a:prstGeom prst="roundRect">
+            <a:avLst>
+              <a:gd name="adj" fmla="val 7143"/>
+            </a:avLst>
+          </a:prstGeom>
+          <a:solidFill>
+            <a:schemeClr val="bg2"/>
+          </a:solidFill>
+          <a:ln/>
+        </p:spPr>
+      </p:sp>
+      <p:sp>
+        <p:nvSpPr>
+          <p:cNvPr id="29" name="cerchio FiUserCheck"/>
+          <p:cNvSpPr/>
+          <p:nvPr/>
+        </p:nvSpPr>
+        <p:spPr>
+          <a:xfrm>
+            <a:off x="621792" y="3538728"/>
+            <a:ext cx="457200" cy="457200"/>
+          </a:xfrm>
+          <a:prstGeom prst="ellipse">
+            <a:avLst/>
+          </a:prstGeom>
+          <a:solidFill>
+            <a:schemeClr val="accent5"/>
+          </a:solidFill>
+          <a:ln/>
+        </p:spPr>
+      </p:sp>
+      <p:pic>
+        <p:nvPicPr>
+          <p:cNvPr id="30" name="Image 4" descr="FiUserCheck">    </p:cNvPr>
+          <p:cNvPicPr>
+            <a:picLocks noChangeAspect="1"/>
+          </p:cNvPicPr>
+          <p:nvPr/>
+        </p:nvPicPr>
+        <p:blipFill>
+          <a:blip r:embed="rId5"/>
+          <a:stretch>
+            <a:fillRect/>
+          </a:stretch>
+        </p:blipFill>
+        <p:spPr>
+          <a:xfrm>
+            <a:off x="736092" y="3653028"/>
+            <a:ext cx="228600" cy="228600"/>
+          </a:xfrm>
+          <a:prstGeom prst="rect">
+            <a:avLst/>
+          </a:prstGeom>
+        </p:spPr>
+      </p:pic>
+      <p:sp>
+        <p:nvSpPr>
+          <p:cNvPr id="31" name="Text 23"/>
+          <p:cNvSpPr txBox="1"/>
+          <p:nvPr/>
+        </p:nvSpPr>
+        <p:spPr>
+          <a:xfrm>
+            <a:off x="1188720" y="3465576"/>
+            <a:ext cx="2697480" cy="502920"/>
+          </a:xfrm>
+          <a:prstGeom prst="rect">
+            <a:avLst/>
+          </a:prstGeom>
+          <a:noFill/>
+          <a:ln/>
+        </p:spPr>
+        <p:txBody>
+          <a:bodyPr wrap="square" lIns="0" tIns="0" rIns="0" bIns="0" rtlCol="0" anchor="ctr"/>
+          <a:lstStyle/>
+          <a:p>
             <a:pPr indent="0" marL="0">
               <a:buNone/>
             </a:pPr>
             <a:r>
-              <a:rPr lang="en-US" sz="1200" b="1" spc="200" kern="0" dirty="0">
+              <a:rPr lang="en-US" sz="1300" b="1" dirty="0">
+                <a:solidFill>
+                  <a:schemeClr val="tx1"/>
+                </a:solidFill>
+              </a:rPr>
+              <a:t>"Il junior controlla l'AI e impara"</a:t>
+            </a:r>
+            <a:endParaRPr lang="en-US" sz="1300" dirty="0"/>
+          </a:p>
+        </p:txBody>
+      </p:sp>
+      <p:sp>
+        <p:nvSpPr>
+          <p:cNvPr id="32" name="Text 24"/>
+          <p:cNvSpPr txBox="1"/>
+          <p:nvPr/>
+        </p:nvSpPr>
+        <p:spPr>
+          <a:xfrm>
+            <a:off x="1188720" y="3977640"/>
+            <a:ext cx="2743200" cy="347472"/>
+          </a:xfrm>
+          <a:prstGeom prst="rect">
+            <a:avLst/>
+          </a:prstGeom>
+          <a:noFill/>
+          <a:ln/>
+        </p:spPr>
+        <p:txBody>
+          <a:bodyPr wrap="square" lIns="0" tIns="0" rIns="0" bIns="0" rtlCol="0" anchor="t"/>
+          <a:lstStyle/>
+          <a:p>
+            <a:pPr indent="0" marL="0">
+              <a:buNone/>
+            </a:pPr>
+            <a:r>
+              <a:rPr lang="en-US" sz="1200" dirty="0">
+                <a:solidFill>
+                  <a:schemeClr val="tx2"/>
+                </a:solidFill>
+              </a:rPr>
+              <a:t>Senza pratica, niente competenza</a:t>
+            </a:r>
+            <a:endParaRPr lang="en-US" sz="1200" dirty="0"/>
+          </a:p>
+        </p:txBody>
+      </p:sp>
+      <p:sp>
+        <p:nvSpPr>
+          <p:cNvPr id="33" name="Text 25"/>
+          <p:cNvSpPr txBox="1"/>
+          <p:nvPr/>
+        </p:nvSpPr>
+        <p:spPr>
+          <a:xfrm>
+            <a:off x="3840480" y="3465576"/>
+            <a:ext cx="502920" cy="365760"/>
+          </a:xfrm>
+          <a:prstGeom prst="rect">
+            <a:avLst/>
+          </a:prstGeom>
+          <a:noFill/>
+          <a:ln/>
+        </p:spPr>
+        <p:txBody>
+          <a:bodyPr wrap="square" lIns="0" tIns="0" rIns="0" bIns="0" rtlCol="0" anchor="t"/>
+          <a:lstStyle/>
+          <a:p>
+            <a:pPr algn="r" indent="0" marL="0">
+              <a:buNone/>
+            </a:pPr>
+            <a:r>
+              <a:rPr lang="en-US" sz="1100" b="1" dirty="0">
                 <a:solidFill>
                   <a:schemeClr val="accent1"/>
                 </a:solidFill>
               </a:rPr>
-              <a:t>NEL PERCORSO</a:t>
+              <a:t>13.7</a:t>
+            </a:r>
+            <a:endParaRPr lang="en-US" sz="1100" dirty="0"/>
+          </a:p>
+        </p:txBody>
+      </p:sp>
+      <p:sp>
+        <p:nvSpPr>
+          <p:cNvPr id="34" name="evitare 6"/>
+          <p:cNvSpPr/>
+          <p:nvPr/>
+        </p:nvSpPr>
+        <p:spPr>
+          <a:xfrm>
+            <a:off x="4663440" y="3374136"/>
+            <a:ext cx="4023360" cy="1024128"/>
+          </a:xfrm>
+          <a:prstGeom prst="roundRect">
+            <a:avLst>
+              <a:gd name="adj" fmla="val 7143"/>
+            </a:avLst>
+          </a:prstGeom>
+          <a:solidFill>
+            <a:schemeClr val="bg2"/>
+          </a:solidFill>
+          <a:ln/>
+        </p:spPr>
+      </p:sp>
+      <p:sp>
+        <p:nvSpPr>
+          <p:cNvPr id="35" name="cerchio FiActivity"/>
+          <p:cNvSpPr/>
+          <p:nvPr/>
+        </p:nvSpPr>
+        <p:spPr>
+          <a:xfrm>
+            <a:off x="4828032" y="3538728"/>
+            <a:ext cx="457200" cy="457200"/>
+          </a:xfrm>
+          <a:prstGeom prst="ellipse">
+            <a:avLst/>
+          </a:prstGeom>
+          <a:solidFill>
+            <a:schemeClr val="accent5"/>
+          </a:solidFill>
+          <a:ln/>
+        </p:spPr>
+      </p:sp>
+      <p:pic>
+        <p:nvPicPr>
+          <p:cNvPr id="36" name="Image 5" descr="FiActivity">    </p:cNvPr>
+          <p:cNvPicPr>
+            <a:picLocks noChangeAspect="1"/>
+          </p:cNvPicPr>
+          <p:nvPr/>
+        </p:nvPicPr>
+        <p:blipFill>
+          <a:blip r:embed="rId6"/>
+          <a:stretch>
+            <a:fillRect/>
+          </a:stretch>
+        </p:blipFill>
+        <p:spPr>
+          <a:xfrm>
+            <a:off x="4942332" y="3653028"/>
+            <a:ext cx="228600" cy="228600"/>
+          </a:xfrm>
+          <a:prstGeom prst="rect">
+            <a:avLst/>
+          </a:prstGeom>
+        </p:spPr>
+      </p:pic>
+      <p:sp>
+        <p:nvSpPr>
+          <p:cNvPr id="37" name="Text 28"/>
+          <p:cNvSpPr txBox="1"/>
+          <p:nvPr/>
+        </p:nvSpPr>
+        <p:spPr>
+          <a:xfrm>
+            <a:off x="5394960" y="3465576"/>
+            <a:ext cx="2697480" cy="502920"/>
+          </a:xfrm>
+          <a:prstGeom prst="rect">
+            <a:avLst/>
+          </a:prstGeom>
+          <a:noFill/>
+          <a:ln/>
+        </p:spPr>
+        <p:txBody>
+          <a:bodyPr wrap="square" lIns="0" tIns="0" rIns="0" bIns="0" rtlCol="0" anchor="ctr"/>
+          <a:lstStyle/>
+          <a:p>
+            <a:pPr indent="0" marL="0">
+              <a:buNone/>
+            </a:pPr>
+            <a:r>
+              <a:rPr lang="en-US" sz="1300" b="1" dirty="0">
+                <a:solidFill>
+                  <a:schemeClr val="tx1"/>
+                </a:solidFill>
+              </a:rPr>
+              <a:t>"Lo usano tutti: il lavoro è cambiato"</a:t>
+            </a:r>
+            <a:endParaRPr lang="en-US" sz="1300" dirty="0"/>
+          </a:p>
+        </p:txBody>
+      </p:sp>
+      <p:sp>
+        <p:nvSpPr>
+          <p:cNvPr id="38" name="Text 29"/>
+          <p:cNvSpPr txBox="1"/>
+          <p:nvPr/>
+        </p:nvSpPr>
+        <p:spPr>
+          <a:xfrm>
+            <a:off x="5394960" y="3977640"/>
+            <a:ext cx="2743200" cy="347472"/>
+          </a:xfrm>
+          <a:prstGeom prst="rect">
+            <a:avLst/>
+          </a:prstGeom>
+          <a:noFill/>
+          <a:ln/>
+        </p:spPr>
+        <p:txBody>
+          <a:bodyPr wrap="square" lIns="0" tIns="0" rIns="0" bIns="0" rtlCol="0" anchor="t"/>
+          <a:lstStyle/>
+          <a:p>
+            <a:pPr indent="0" marL="0">
+              <a:buNone/>
+            </a:pPr>
+            <a:r>
+              <a:rPr lang="en-US" sz="1200" dirty="0">
+                <a:solidFill>
+                  <a:schemeClr val="tx2"/>
+                </a:solidFill>
+              </a:rPr>
+              <a:t>Adozione non è trasformazione</a:t>
             </a:r>
             <a:endParaRPr lang="en-US" sz="1200" dirty="0"/>
           </a:p>
@@ -53805,14 +54391,14 @@
       </p:sp>
       <p:sp>
         <p:nvSpPr>
-          <p:cNvPr id="19" name="Text 16"/>
-          <p:cNvSpPr txBox="1"/>
-          <p:nvPr/>
-        </p:nvSpPr>
-        <p:spPr>
-          <a:xfrm>
-            <a:off x="4937760" y="3063240"/>
-            <a:ext cx="3566160" cy="1097280"/>
+          <p:cNvPr id="39" name="Text 30"/>
+          <p:cNvSpPr txBox="1"/>
+          <p:nvPr/>
+        </p:nvSpPr>
+        <p:spPr>
+          <a:xfrm>
+            <a:off x="8046720" y="3465576"/>
+            <a:ext cx="502920" cy="365760"/>
           </a:xfrm>
           <a:prstGeom prst="rect">
             <a:avLst/>
@@ -53824,40 +54410,18 @@
           <a:bodyPr wrap="square" lIns="0" tIns="0" rIns="0" bIns="0" rtlCol="0" anchor="t"/>
           <a:lstStyle/>
           <a:p>
-            <a:pPr marL="177800" indent="-177800">
-              <a:spcAft>
-                <a:spcPts val="500"/>
-              </a:spcAft>
-              <a:buSzPct val="100000"/>
-              <a:buChar char="•"/>
-            </a:pPr>
-            <a:r>
-              <a:rPr lang="en-US" sz="1300" dirty="0">
-                <a:solidFill>
-                  <a:schemeClr val="bg1"/>
-                </a:solidFill>
-              </a:rPr>
-              <a:t>Tema 15: opportunità e valutazione</a:t>
-            </a:r>
-            <a:endParaRPr lang="en-US" sz="1300" dirty="0"/>
-          </a:p>
-          <a:p>
-            <a:pPr marL="177800" indent="-177800">
-              <a:spcAft>
-                <a:spcPts val="500"/>
-              </a:spcAft>
-              <a:buSzPct val="100000"/>
-              <a:buChar char="•"/>
-            </a:pPr>
-            <a:r>
-              <a:rPr lang="en-US" sz="1300" dirty="0">
-                <a:solidFill>
-                  <a:schemeClr val="bg1"/>
-                </a:solidFill>
-              </a:rPr>
-              <a:t>Tema 16: adozione e cambiamento organizzativo</a:t>
-            </a:r>
-            <a:endParaRPr lang="en-US" sz="1300" dirty="0"/>
+            <a:pPr algn="r" indent="0" marL="0">
+              <a:buNone/>
+            </a:pPr>
+            <a:r>
+              <a:rPr lang="en-US" sz="1100" b="1" dirty="0">
+                <a:solidFill>
+                  <a:schemeClr val="accent1"/>
+                </a:solidFill>
+              </a:rPr>
+              <a:t>13.8</a:t>
+            </a:r>
+            <a:endParaRPr lang="en-US" sz="1100" dirty="0"/>
           </a:p>
         </p:txBody>
       </p:sp>
@@ -53963,6 +54527,684 @@
                   <a:schemeClr val="tx1"/>
                 </a:solidFill>
               </a:rPr>
+              <a:t>Che cosa viene dopo</a:t>
+            </a:r>
+            <a:endParaRPr lang="en-US" sz="2600" dirty="0"/>
+          </a:p>
+        </p:txBody>
+      </p:sp>
+      <p:sp>
+        <p:nvSpPr>
+          <p:cNvPr id="4" name="aree"/>
+          <p:cNvSpPr/>
+          <p:nvPr/>
+        </p:nvSpPr>
+        <p:spPr>
+          <a:xfrm>
+            <a:off x="457200" y="1097280"/>
+            <a:ext cx="3977640" cy="3429000"/>
+          </a:xfrm>
+          <a:prstGeom prst="roundRect">
+            <a:avLst>
+              <a:gd name="adj" fmla="val 2133"/>
+            </a:avLst>
+          </a:prstGeom>
+          <a:solidFill>
+            <a:schemeClr val="bg2"/>
+          </a:solidFill>
+          <a:ln/>
+        </p:spPr>
+      </p:sp>
+      <p:sp>
+        <p:nvSpPr>
+          <p:cNvPr id="5" name="Text 2"/>
+          <p:cNvSpPr txBox="1"/>
+          <p:nvPr/>
+        </p:nvSpPr>
+        <p:spPr>
+          <a:xfrm>
+            <a:off x="685800" y="1261872"/>
+            <a:ext cx="3566160" cy="274320"/>
+          </a:xfrm>
+          <a:prstGeom prst="rect">
+            <a:avLst/>
+          </a:prstGeom>
+          <a:noFill/>
+          <a:ln/>
+        </p:spPr>
+        <p:txBody>
+          <a:bodyPr wrap="square" lIns="0" tIns="0" rIns="0" bIns="0" rtlCol="0" anchor="t"/>
+          <a:lstStyle/>
+          <a:p>
+            <a:pPr indent="0" marL="0">
+              <a:buNone/>
+            </a:pPr>
+            <a:r>
+              <a:rPr lang="en-US" sz="1200" b="1" spc="200" kern="0" dirty="0">
+                <a:solidFill>
+                  <a:schemeClr val="accent2"/>
+                </a:solidFill>
+              </a:rPr>
+              <a:t>PERCORSO</a:t>
+            </a:r>
+            <a:endParaRPr lang="en-US" sz="1200" dirty="0"/>
+          </a:p>
+        </p:txBody>
+      </p:sp>
+      <p:sp>
+        <p:nvSpPr>
+          <p:cNvPr id="6" name="Text 3"/>
+          <p:cNvSpPr txBox="1"/>
+          <p:nvPr/>
+        </p:nvSpPr>
+        <p:spPr>
+          <a:xfrm>
+            <a:off x="685800" y="1572768"/>
+            <a:ext cx="3566160" cy="292608"/>
+          </a:xfrm>
+          <a:prstGeom prst="rect">
+            <a:avLst/>
+          </a:prstGeom>
+          <a:noFill/>
+          <a:ln/>
+        </p:spPr>
+        <p:txBody>
+          <a:bodyPr wrap="square" lIns="0" tIns="0" rIns="0" bIns="0" rtlCol="0" anchor="t"/>
+          <a:lstStyle/>
+          <a:p>
+            <a:pPr indent="0" marL="0">
+              <a:buNone/>
+            </a:pPr>
+            <a:r>
+              <a:rPr lang="en-US" sz="1400" b="1" dirty="0">
+                <a:solidFill>
+                  <a:schemeClr val="tx1"/>
+                </a:solidFill>
+              </a:rPr>
+              <a:t>Comprendere l'AI</a:t>
+            </a:r>
+            <a:endParaRPr lang="en-US" sz="1400" dirty="0"/>
+          </a:p>
+        </p:txBody>
+      </p:sp>
+      <p:sp>
+        <p:nvSpPr>
+          <p:cNvPr id="7" name="Text 4"/>
+          <p:cNvSpPr txBox="1"/>
+          <p:nvPr/>
+        </p:nvSpPr>
+        <p:spPr>
+          <a:xfrm>
+            <a:off x="685800" y="1856232"/>
+            <a:ext cx="3566160" cy="274320"/>
+          </a:xfrm>
+          <a:prstGeom prst="rect">
+            <a:avLst/>
+          </a:prstGeom>
+          <a:noFill/>
+          <a:ln/>
+        </p:spPr>
+        <p:txBody>
+          <a:bodyPr wrap="square" lIns="0" tIns="0" rIns="0" bIns="0" rtlCol="0" anchor="t"/>
+          <a:lstStyle/>
+          <a:p>
+            <a:pPr indent="0" marL="0">
+              <a:buNone/>
+            </a:pPr>
+            <a:r>
+              <a:rPr lang="en-US" sz="1200" dirty="0">
+                <a:solidFill>
+                  <a:schemeClr val="tx2"/>
+                </a:solidFill>
+              </a:rPr>
+              <a:t>Temi 1-4</a:t>
+            </a:r>
+            <a:endParaRPr lang="en-US" sz="1200" dirty="0"/>
+          </a:p>
+        </p:txBody>
+      </p:sp>
+      <p:sp>
+        <p:nvSpPr>
+          <p:cNvPr id="8" name="Text 5"/>
+          <p:cNvSpPr txBox="1"/>
+          <p:nvPr/>
+        </p:nvSpPr>
+        <p:spPr>
+          <a:xfrm>
+            <a:off x="685800" y="2194560"/>
+            <a:ext cx="3566160" cy="292608"/>
+          </a:xfrm>
+          <a:prstGeom prst="rect">
+            <a:avLst/>
+          </a:prstGeom>
+          <a:noFill/>
+          <a:ln/>
+        </p:spPr>
+        <p:txBody>
+          <a:bodyPr wrap="square" lIns="0" tIns="0" rIns="0" bIns="0" rtlCol="0" anchor="t"/>
+          <a:lstStyle/>
+          <a:p>
+            <a:pPr indent="0" marL="0">
+              <a:buNone/>
+            </a:pPr>
+            <a:r>
+              <a:rPr lang="en-US" sz="1400" b="1" dirty="0">
+                <a:solidFill>
+                  <a:schemeClr val="tx1"/>
+                </a:solidFill>
+              </a:rPr>
+              <a:t>Interagire con l'AI</a:t>
+            </a:r>
+            <a:endParaRPr lang="en-US" sz="1400" dirty="0"/>
+          </a:p>
+        </p:txBody>
+      </p:sp>
+      <p:sp>
+        <p:nvSpPr>
+          <p:cNvPr id="9" name="Text 6"/>
+          <p:cNvSpPr txBox="1"/>
+          <p:nvPr/>
+        </p:nvSpPr>
+        <p:spPr>
+          <a:xfrm>
+            <a:off x="685800" y="2478024"/>
+            <a:ext cx="3566160" cy="274320"/>
+          </a:xfrm>
+          <a:prstGeom prst="rect">
+            <a:avLst/>
+          </a:prstGeom>
+          <a:noFill/>
+          <a:ln/>
+        </p:spPr>
+        <p:txBody>
+          <a:bodyPr wrap="square" lIns="0" tIns="0" rIns="0" bIns="0" rtlCol="0" anchor="t"/>
+          <a:lstStyle/>
+          <a:p>
+            <a:pPr indent="0" marL="0">
+              <a:buNone/>
+            </a:pPr>
+            <a:r>
+              <a:rPr lang="en-US" sz="1200" dirty="0">
+                <a:solidFill>
+                  <a:schemeClr val="tx2"/>
+                </a:solidFill>
+              </a:rPr>
+              <a:t>Temi 5-7</a:t>
+            </a:r>
+            <a:endParaRPr lang="en-US" sz="1200" dirty="0"/>
+          </a:p>
+        </p:txBody>
+      </p:sp>
+      <p:sp>
+        <p:nvSpPr>
+          <p:cNvPr id="10" name="Text 7"/>
+          <p:cNvSpPr txBox="1"/>
+          <p:nvPr/>
+        </p:nvSpPr>
+        <p:spPr>
+          <a:xfrm>
+            <a:off x="685800" y="2816352"/>
+            <a:ext cx="3566160" cy="292608"/>
+          </a:xfrm>
+          <a:prstGeom prst="rect">
+            <a:avLst/>
+          </a:prstGeom>
+          <a:noFill/>
+          <a:ln/>
+        </p:spPr>
+        <p:txBody>
+          <a:bodyPr wrap="square" lIns="0" tIns="0" rIns="0" bIns="0" rtlCol="0" anchor="t"/>
+          <a:lstStyle/>
+          <a:p>
+            <a:pPr indent="0" marL="0">
+              <a:buNone/>
+            </a:pPr>
+            <a:r>
+              <a:rPr lang="en-US" sz="1400" b="1" dirty="0">
+                <a:solidFill>
+                  <a:schemeClr val="tx1"/>
+                </a:solidFill>
+              </a:rPr>
+              <a:t>Esplorare le possibilità dell'AI</a:t>
+            </a:r>
+            <a:endParaRPr lang="en-US" sz="1400" dirty="0"/>
+          </a:p>
+        </p:txBody>
+      </p:sp>
+      <p:sp>
+        <p:nvSpPr>
+          <p:cNvPr id="11" name="Text 8"/>
+          <p:cNvSpPr txBox="1"/>
+          <p:nvPr/>
+        </p:nvSpPr>
+        <p:spPr>
+          <a:xfrm>
+            <a:off x="685800" y="3099816"/>
+            <a:ext cx="3566160" cy="274320"/>
+          </a:xfrm>
+          <a:prstGeom prst="rect">
+            <a:avLst/>
+          </a:prstGeom>
+          <a:noFill/>
+          <a:ln/>
+        </p:spPr>
+        <p:txBody>
+          <a:bodyPr wrap="square" lIns="0" tIns="0" rIns="0" bIns="0" rtlCol="0" anchor="t"/>
+          <a:lstStyle/>
+          <a:p>
+            <a:pPr indent="0" marL="0">
+              <a:buNone/>
+            </a:pPr>
+            <a:r>
+              <a:rPr lang="en-US" sz="1200" dirty="0">
+                <a:solidFill>
+                  <a:schemeClr val="tx2"/>
+                </a:solidFill>
+              </a:rPr>
+              <a:t>Temi 8-11</a:t>
+            </a:r>
+            <a:endParaRPr lang="en-US" sz="1200" dirty="0"/>
+          </a:p>
+        </p:txBody>
+      </p:sp>
+      <p:sp>
+        <p:nvSpPr>
+          <p:cNvPr id="12" name="Text 9"/>
+          <p:cNvSpPr txBox="1"/>
+          <p:nvPr/>
+        </p:nvSpPr>
+        <p:spPr>
+          <a:xfrm>
+            <a:off x="685800" y="3438144"/>
+            <a:ext cx="3566160" cy="292608"/>
+          </a:xfrm>
+          <a:prstGeom prst="rect">
+            <a:avLst/>
+          </a:prstGeom>
+          <a:noFill/>
+          <a:ln/>
+        </p:spPr>
+        <p:txBody>
+          <a:bodyPr wrap="square" lIns="0" tIns="0" rIns="0" bIns="0" rtlCol="0" anchor="t"/>
+          <a:lstStyle/>
+          <a:p>
+            <a:pPr indent="0" marL="0">
+              <a:buNone/>
+            </a:pPr>
+            <a:r>
+              <a:rPr lang="en-US" sz="1400" b="1" dirty="0">
+                <a:solidFill>
+                  <a:schemeClr val="accent1"/>
+                </a:solidFill>
+              </a:rPr>
+              <a:t>Comprendere il valore per l'azienda</a:t>
+            </a:r>
+            <a:endParaRPr lang="en-US" sz="1400" dirty="0"/>
+          </a:p>
+        </p:txBody>
+      </p:sp>
+      <p:sp>
+        <p:nvSpPr>
+          <p:cNvPr id="13" name="Text 10"/>
+          <p:cNvSpPr txBox="1"/>
+          <p:nvPr/>
+        </p:nvSpPr>
+        <p:spPr>
+          <a:xfrm>
+            <a:off x="685800" y="3721608"/>
+            <a:ext cx="3566160" cy="502920"/>
+          </a:xfrm>
+          <a:prstGeom prst="rect">
+            <a:avLst/>
+          </a:prstGeom>
+          <a:noFill/>
+          <a:ln/>
+        </p:spPr>
+        <p:txBody>
+          <a:bodyPr wrap="square" lIns="0" tIns="0" rIns="0" bIns="0" rtlCol="0" anchor="t"/>
+          <a:lstStyle/>
+          <a:p>
+            <a:pPr indent="0" marL="0">
+              <a:buNone/>
+            </a:pPr>
+            <a:r>
+              <a:rPr lang="en-US" sz="1200" dirty="0">
+                <a:solidFill>
+                  <a:schemeClr val="tx2"/>
+                </a:solidFill>
+              </a:rPr>
+              <a:t>Tema 12: valore; Tema 13: lavoro e processi (completato)</a:t>
+            </a:r>
+            <a:endParaRPr lang="en-US" sz="1200" dirty="0"/>
+          </a:p>
+        </p:txBody>
+      </p:sp>
+      <p:sp>
+        <p:nvSpPr>
+          <p:cNvPr id="14" name="prossimi"/>
+          <p:cNvSpPr/>
+          <p:nvPr/>
+        </p:nvSpPr>
+        <p:spPr>
+          <a:xfrm>
+            <a:off x="4709160" y="1097280"/>
+            <a:ext cx="3977640" cy="3429000"/>
+          </a:xfrm>
+          <a:prstGeom prst="roundRect">
+            <a:avLst>
+              <a:gd name="adj" fmla="val 2133"/>
+            </a:avLst>
+          </a:prstGeom>
+          <a:solidFill>
+            <a:schemeClr val="tx1"/>
+          </a:solidFill>
+          <a:ln/>
+        </p:spPr>
+      </p:sp>
+      <p:sp>
+        <p:nvSpPr>
+          <p:cNvPr id="15" name="Text 12"/>
+          <p:cNvSpPr txBox="1"/>
+          <p:nvPr/>
+        </p:nvSpPr>
+        <p:spPr>
+          <a:xfrm>
+            <a:off x="4937760" y="1261872"/>
+            <a:ext cx="3566160" cy="274320"/>
+          </a:xfrm>
+          <a:prstGeom prst="rect">
+            <a:avLst/>
+          </a:prstGeom>
+          <a:noFill/>
+          <a:ln/>
+        </p:spPr>
+        <p:txBody>
+          <a:bodyPr wrap="square" lIns="0" tIns="0" rIns="0" bIns="0" rtlCol="0" anchor="t"/>
+          <a:lstStyle/>
+          <a:p>
+            <a:pPr indent="0" marL="0">
+              <a:buNone/>
+            </a:pPr>
+            <a:r>
+              <a:rPr lang="en-US" sz="1200" b="1" spc="200" kern="0" dirty="0">
+                <a:solidFill>
+                  <a:schemeClr val="accent1"/>
+                </a:solidFill>
+              </a:rPr>
+              <a:t>PROSSIMO TEMA</a:t>
+            </a:r>
+            <a:endParaRPr lang="en-US" sz="1200" dirty="0"/>
+          </a:p>
+        </p:txBody>
+      </p:sp>
+      <p:sp>
+        <p:nvSpPr>
+          <p:cNvPr id="16" name="Text 13"/>
+          <p:cNvSpPr txBox="1"/>
+          <p:nvPr/>
+        </p:nvSpPr>
+        <p:spPr>
+          <a:xfrm>
+            <a:off x="4937760" y="1572768"/>
+            <a:ext cx="3566160" cy="594360"/>
+          </a:xfrm>
+          <a:prstGeom prst="rect">
+            <a:avLst/>
+          </a:prstGeom>
+          <a:noFill/>
+          <a:ln/>
+        </p:spPr>
+        <p:txBody>
+          <a:bodyPr wrap="square" lIns="0" tIns="0" rIns="0" bIns="0" rtlCol="0" anchor="t"/>
+          <a:lstStyle/>
+          <a:p>
+            <a:pPr indent="0" marL="0">
+              <a:buNone/>
+            </a:pPr>
+            <a:r>
+              <a:rPr lang="en-US" sz="1500" b="1" dirty="0">
+                <a:solidFill>
+                  <a:schemeClr val="bg1"/>
+                </a:solidFill>
+              </a:rPr>
+              <a:t>Tema 14: AI, dati e conoscenza aziendale</a:t>
+            </a:r>
+            <a:endParaRPr lang="en-US" sz="1500" dirty="0"/>
+          </a:p>
+        </p:txBody>
+      </p:sp>
+      <p:sp>
+        <p:nvSpPr>
+          <p:cNvPr id="17" name="Text 14"/>
+          <p:cNvSpPr txBox="1"/>
+          <p:nvPr/>
+        </p:nvSpPr>
+        <p:spPr>
+          <a:xfrm>
+            <a:off x="4937760" y="2194560"/>
+            <a:ext cx="3566160" cy="457200"/>
+          </a:xfrm>
+          <a:prstGeom prst="rect">
+            <a:avLst/>
+          </a:prstGeom>
+          <a:noFill/>
+          <a:ln/>
+        </p:spPr>
+        <p:txBody>
+          <a:bodyPr wrap="square" lIns="0" tIns="0" rIns="0" bIns="0" rtlCol="0" anchor="t"/>
+          <a:lstStyle/>
+          <a:p>
+            <a:pPr indent="0" marL="0">
+              <a:buNone/>
+            </a:pPr>
+            <a:r>
+              <a:rPr lang="en-US" sz="1200" i="1" dirty="0">
+                <a:solidFill>
+                  <a:schemeClr val="accent3"/>
+                </a:solidFill>
+              </a:rPr>
+              <a:t>Patrimonio informativo, qualità, accessi, affidabilità</a:t>
+            </a:r>
+            <a:endParaRPr lang="en-US" sz="1200" dirty="0"/>
+          </a:p>
+        </p:txBody>
+      </p:sp>
+      <p:sp>
+        <p:nvSpPr>
+          <p:cNvPr id="18" name="Text 15"/>
+          <p:cNvSpPr txBox="1"/>
+          <p:nvPr/>
+        </p:nvSpPr>
+        <p:spPr>
+          <a:xfrm>
+            <a:off x="4937760" y="2743200"/>
+            <a:ext cx="3566160" cy="274320"/>
+          </a:xfrm>
+          <a:prstGeom prst="rect">
+            <a:avLst/>
+          </a:prstGeom>
+          <a:noFill/>
+          <a:ln/>
+        </p:spPr>
+        <p:txBody>
+          <a:bodyPr wrap="square" lIns="0" tIns="0" rIns="0" bIns="0" rtlCol="0" anchor="t"/>
+          <a:lstStyle/>
+          <a:p>
+            <a:pPr indent="0" marL="0">
+              <a:buNone/>
+            </a:pPr>
+            <a:r>
+              <a:rPr lang="en-US" sz="1200" b="1" spc="200" kern="0" dirty="0">
+                <a:solidFill>
+                  <a:schemeClr val="accent1"/>
+                </a:solidFill>
+              </a:rPr>
+              <a:t>NEL PERCORSO</a:t>
+            </a:r>
+            <a:endParaRPr lang="en-US" sz="1200" dirty="0"/>
+          </a:p>
+        </p:txBody>
+      </p:sp>
+      <p:sp>
+        <p:nvSpPr>
+          <p:cNvPr id="19" name="Text 16"/>
+          <p:cNvSpPr txBox="1"/>
+          <p:nvPr/>
+        </p:nvSpPr>
+        <p:spPr>
+          <a:xfrm>
+            <a:off x="4937760" y="3063240"/>
+            <a:ext cx="3566160" cy="1097280"/>
+          </a:xfrm>
+          <a:prstGeom prst="rect">
+            <a:avLst/>
+          </a:prstGeom>
+          <a:noFill/>
+          <a:ln/>
+        </p:spPr>
+        <p:txBody>
+          <a:bodyPr wrap="square" lIns="0" tIns="0" rIns="0" bIns="0" rtlCol="0" anchor="t"/>
+          <a:lstStyle/>
+          <a:p>
+            <a:pPr marL="177800" indent="-177800">
+              <a:spcAft>
+                <a:spcPts val="500"/>
+              </a:spcAft>
+              <a:buSzPct val="100000"/>
+              <a:buChar char="•"/>
+            </a:pPr>
+            <a:r>
+              <a:rPr lang="en-US" sz="1300" dirty="0">
+                <a:solidFill>
+                  <a:schemeClr val="bg1"/>
+                </a:solidFill>
+              </a:rPr>
+              <a:t>Tema 15: opportunità e valutazione</a:t>
+            </a:r>
+            <a:endParaRPr lang="en-US" sz="1300" dirty="0"/>
+          </a:p>
+          <a:p>
+            <a:pPr marL="177800" indent="-177800">
+              <a:spcAft>
+                <a:spcPts val="500"/>
+              </a:spcAft>
+              <a:buSzPct val="100000"/>
+              <a:buChar char="•"/>
+            </a:pPr>
+            <a:r>
+              <a:rPr lang="en-US" sz="1300" dirty="0">
+                <a:solidFill>
+                  <a:schemeClr val="bg1"/>
+                </a:solidFill>
+              </a:rPr>
+              <a:t>Tema 16: adozione e cambiamento organizzativo</a:t>
+            </a:r>
+            <a:endParaRPr lang="en-US" sz="1300" dirty="0"/>
+          </a:p>
+        </p:txBody>
+      </p:sp>
+      <p:sp>
+        <p:nvSpPr>
+          <p:cNvPr id="25" name="Slide Number Placeholder 0"/>
+          <p:cNvSpPr>
+            <a:spLocks noGrp="1"/>
+          </p:cNvSpPr>
+          <p:nvPr>
+            <p:ph type="sldNum" sz="quarter" idx="4294967295"/>
+          </p:nvPr>
+        </p:nvSpPr>
+        <p:spPr>
+          <a:xfrm>
+            <a:off x="8229600" y="4754880"/>
+            <a:ext cx="457200" cy="228600"/>
+          </a:xfrm>
+          <a:prstGeom prst="rect">
+            <a:avLst/>
+          </a:prstGeom>
+          <a:extLst>
+            <a:ext uri="{C572A759-6A51-4108-AA02-DFA0A04FC94B}">
+              <ma14:wrappingTextBoxFlag xmlns:ma14="http://schemas.microsoft.com/office/mac/drawingml/2011/main" val="0"/>
+            </a:ext>
+          </a:extLst>
+        </p:spPr>
+        <p:txBody>
+          <a:bodyPr/>
+          <a:lstStyle>
+            <a:lvl1pPr>
+              <a:defRPr sz="900">
+                <a:solidFill>
+                  <a:schemeClr val="accent2"/>
+                </a:solidFill>
+              </a:defRPr>
+            </a:lvl1pPr>
+          </a:lstStyle>
+          <a:p>
+            <a:pPr algn="r"/>
+            <a:fld id="{F7021451-1387-4CA6-816F-3879F97B5CBC}" type="slidenum">
+              <a:rPr b="0" lang="en-US"/>
+              <a:t>63</a:t>
+            </a:fld>
+            <a:endParaRPr lang="en-US"/>
+          </a:p>
+        </p:txBody>
+      </p:sp>
+    </p:spTree>
+  </p:cSld>
+  <p:clrMapOvr>
+    <a:masterClrMapping/>
+  </p:clrMapOvr>
+</p:sld>
+</file>
+
+<file path=ppt/slides/slide64.xml><?xml version="1.0" encoding="utf-8"?>
+<p:sld xmlns:a="http://schemas.openxmlformats.org/drawingml/2006/main" xmlns:r="http://schemas.openxmlformats.org/officeDocument/2006/relationships" xmlns:p="http://schemas.openxmlformats.org/presentationml/2006/main">
+  <p:cSld name="Slide 64">
+    <p:spTree>
+      <p:nvGrpSpPr>
+        <p:cNvPr id="1" name=""/>
+        <p:cNvGrpSpPr/>
+        <p:nvPr/>
+      </p:nvGrpSpPr>
+      <p:grpSpPr>
+        <a:xfrm>
+          <a:off x="0" y="0"/>
+          <a:ext cx="0" cy="0"/>
+          <a:chOff x="0" y="0"/>
+          <a:chExt cx="0" cy="0"/>
+        </a:xfrm>
+      </p:grpSpPr>
+      <p:sp>
+        <p:nvSpPr>
+          <p:cNvPr id="2" name="Text 0"/>
+          <p:cNvSpPr/>
+          <p:nvPr>
+            <p:ph idx="100" type="title" hasCustomPrompt="1"/>
+          </p:nvPr>
+        </p:nvSpPr>
+        <p:spPr>
+          <a:xfrm>
+            <a:off x="457200" y="256032"/>
+            <a:ext cx="8229600" cy="640080"/>
+          </a:xfrm>
+          <a:prstGeom prst="rect">
+            <a:avLst/>
+          </a:prstGeom>
+          <a:noFill/>
+          <a:ln/>
+        </p:spPr>
+        <p:txBody>
+          <a:bodyPr wrap="square" lIns="0" tIns="0" rIns="0" bIns="0" rtlCol="0" anchor="ctr"/>
+          <a:lstStyle/>
+          <a:p>
+            <a:pPr algn="l" indent="0" marL="0">
+              <a:buNone/>
+            </a:pPr>
+            <a:r>
+              <a:rPr lang="en-US" sz="2600" b="1" dirty="0">
+                <a:solidFill>
+                  <a:schemeClr val="tx1"/>
+                </a:solidFill>
+              </a:rPr>
               <a:t>Fonti e riferimenti</a:t>
             </a:r>
             <a:endParaRPr lang="en-US" sz="2600" dirty="0"/>
@@ -54047,7 +55289,7 @@
                   <a:schemeClr val="tx1"/>
                 </a:solidFill>
               </a:rPr>
-              <a:t>Eloundou, T., Manning, S., Mishkin, P., Rock, D. (2023). GPTs are GPTs: An Early Look at the Labor Market Impact Potential of Large Language Models. arXiv:2303.10130.</a:t>
+              <a:t>Eloundou, T., Manning, S., Mishkin, P., Rock, D. (2024). GPTs are GPTs: Labor market impact potential of LLMs. Science, 384(6702), 1306-1308. Analisi completa: arXiv:2303.10130 (2023).</a:t>
             </a:r>
             <a:endParaRPr lang="en-US" sz="1300" dirty="0"/>
           </a:p>
@@ -54083,7 +55325,7 @@
                   <a:schemeClr val="tx1"/>
                 </a:solidFill>
               </a:rPr>
-              <a:t>Autor, D. H., Levy, F., Murnane, R. J. (2003). The Skill Content of Recent Technological Change. Quarterly Journal of Economics, 118(4).</a:t>
+              <a:t>Autor, D. H., Levy, F., Murnane, R. J. (2003). The Skill Content of Recent Technological Change. Quarterly Journal of Economics, 118(4), 1279-1333.</a:t>
             </a:r>
             <a:endParaRPr lang="en-US" sz="1300" dirty="0"/>
           </a:p>
@@ -54104,6 +55346,42 @@
               <a:t>Gli esempi aziendali e i numeri delle slide sono inventati a scopo didattico.</a:t>
             </a:r>
             <a:endParaRPr lang="en-US" sz="1300" dirty="0"/>
+          </a:p>
+        </p:txBody>
+      </p:sp>
+      <p:sp>
+        <p:nvSpPr>
+          <p:cNvPr id="7" name="Text 3"/>
+          <p:cNvSpPr txBox="1"/>
+          <p:nvPr/>
+        </p:nvSpPr>
+        <p:spPr>
+          <a:xfrm>
+            <a:off x="1188720" y="4297680"/>
+            <a:ext cx="7498080" cy="274320"/>
+          </a:xfrm>
+          <a:prstGeom prst="rect">
+            <a:avLst/>
+          </a:prstGeom>
+          <a:noFill/>
+          <a:ln/>
+        </p:spPr>
+        <p:txBody>
+          <a:bodyPr wrap="square" lIns="0" tIns="0" rIns="0" bIns="0" rtlCol="0" anchor="t"/>
+          <a:lstStyle/>
+          <a:p>
+            <a:pPr indent="0" marL="0">
+              <a:buNone/>
+            </a:pPr>
+            <a:r>
+              <a:rPr lang="en-US" sz="1100" i="1" dirty="0">
+                <a:solidFill>
+                  <a:schemeClr val="accent2"/>
+                </a:solidFill>
+              </a:rPr>
+              <a:t>Fonti verificate a ottobre 2026: ricontrollarle prima di ogni edizione.</a:t>
+            </a:r>
+            <a:endParaRPr lang="en-US" sz="1100" dirty="0"/>
           </a:p>
         </p:txBody>
       </p:sp>
@@ -54146,7 +55424,7 @@
             <a:pPr algn="r"/>
             <a:fld id="{F7021451-1387-4CA6-816F-3879F97B5CBC}" type="slidenum">
               <a:rPr b="0" lang="en-US"/>
-              <a:t>63</a:t>
+              <a:t>64</a:t>
             </a:fld>
             <a:endParaRPr lang="en-US"/>
           </a:p>
